--- a/AgentFramework  -  Final.pptx
+++ b/AgentFramework  -  Final.pptx
@@ -5,12 +5,13 @@
     <p:sldMasterId id="2147483648" r:id="rId1"/>
   </p:sldMasterIdLst>
   <p:notesMasterIdLst>
-    <p:notesMasterId r:id="rId5"/>
+    <p:notesMasterId r:id="rId6"/>
   </p:notesMasterIdLst>
   <p:sldIdLst>
     <p:sldId id="256" r:id="rId2"/>
     <p:sldId id="257" r:id="rId3"/>
     <p:sldId id="258" r:id="rId4"/>
+    <p:sldId id="259" r:id="rId5"/>
   </p:sldIdLst>
   <p:sldSz cx="9144000" cy="5143500" type="screen16x9"/>
   <p:notesSz cx="5143500" cy="9144000"/>
@@ -139,7 +140,7 @@
     </p:spTree>
     <p:extLst>
       <p:ext uri="{BB962C8B-B14F-4D97-AF65-F5344CB8AC3E}">
-        <p14:creationId xmlns:p14="http://schemas.microsoft.com/office/powerpoint/2010/main" val="191615096"/>
+        <p14:creationId xmlns:p14="http://schemas.microsoft.com/office/powerpoint/2010/main" val="1563181401"/>
       </p:ext>
     </p:extLst>
   </p:cSld>
@@ -473,6 +474,90 @@
             <a:fld id="{F7021451-1387-4CA6-816F-3879F97B5CBC}" type="slidenum">
               <a:rPr lang="en-US"/>
               <a:t>3</a:t>
+            </a:fld>
+            <a:endParaRPr lang="en-US"/>
+          </a:p>
+        </p:txBody>
+      </p:sp>
+    </p:spTree>
+    <p:extLst>
+      <p:ext uri="{BB962C8B-B14F-4D97-AF65-F5344CB8AC3E}">
+        <p14:creationId xmlns:p14="http://schemas.microsoft.com/office/powerpoint/2010/main" val="1024086991"/>
+      </p:ext>
+    </p:extLst>
+  </p:cSld>
+  <p:clrMapOvr>
+    <a:masterClrMapping/>
+  </p:clrMapOvr>
+</p:notes>
+</file>
+
+<file path=ppt/notesSlides/notesSlide4.xml><?xml version="1.0" encoding="utf-8"?>
+<p:notes xmlns:a="http://schemas.openxmlformats.org/drawingml/2006/main" xmlns:r="http://schemas.openxmlformats.org/officeDocument/2006/relationships" xmlns:p="http://schemas.openxmlformats.org/presentationml/2006/main">
+  <p:cSld>
+    <p:spTree>
+      <p:nvGrpSpPr>
+        <p:cNvPr id="1" name=""/>
+        <p:cNvGrpSpPr/>
+        <p:nvPr/>
+      </p:nvGrpSpPr>
+      <p:grpSpPr>
+        <a:xfrm>
+          <a:off x="0" y="0"/>
+          <a:ext cx="0" cy="0"/>
+          <a:chOff x="0" y="0"/>
+          <a:chExt cx="0" cy="0"/>
+        </a:xfrm>
+      </p:grpSpPr>
+      <p:sp>
+        <p:nvSpPr>
+          <p:cNvPr id="2" name="Slide Image Placeholder 1"/>
+          <p:cNvSpPr>
+            <a:spLocks noGrp="1" noRot="1" noChangeAspect="1"/>
+          </p:cNvSpPr>
+          <p:nvPr>
+            <p:ph type="sldImg"/>
+          </p:nvPr>
+        </p:nvSpPr>
+        <p:spPr/>
+      </p:sp>
+      <p:sp>
+        <p:nvSpPr>
+          <p:cNvPr id="3" name="Notes Placeholder 2"/>
+          <p:cNvSpPr>
+            <a:spLocks noGrp="1"/>
+          </p:cNvSpPr>
+          <p:nvPr>
+            <p:ph type="body" idx="1"/>
+          </p:nvPr>
+        </p:nvSpPr>
+        <p:spPr/>
+        <p:txBody>
+          <a:bodyPr/>
+          <a:lstStyle/>
+          <a:p>
+            <a:endParaRPr lang="en-US" dirty="0"/>
+          </a:p>
+        </p:txBody>
+      </p:sp>
+      <p:sp>
+        <p:nvSpPr>
+          <p:cNvPr id="4" name="Slide Number Placeholder 3"/>
+          <p:cNvSpPr>
+            <a:spLocks noGrp="1"/>
+          </p:cNvSpPr>
+          <p:nvPr>
+            <p:ph type="sldNum" sz="quarter" idx="10"/>
+          </p:nvPr>
+        </p:nvSpPr>
+        <p:spPr/>
+        <p:txBody>
+          <a:bodyPr/>
+          <a:lstStyle/>
+          <a:p>
+            <a:fld id="{F7021451-1387-4CA6-816F-3879F97B5CBC}" type="slidenum">
+              <a:rPr lang="en-US"/>
+              <a:t>4</a:t>
             </a:fld>
             <a:endParaRPr lang="en-US"/>
           </a:p>
@@ -6863,49 +6948,6 @@
               </a:rPr>
               <a:t>COVERAGE</a:t>
             </a:r>
-          </a:p>
-          <a:p>
-            <a:pPr marL="0" indent="0">
-              <a:lnSpc>
-                <a:spcPct val="120000"/>
-              </a:lnSpc>
-              <a:buNone/>
-            </a:pPr>
-            <a:r>
-              <a:rPr lang="en-US" sz="650" b="1" i="1" kern="0" spc="200" dirty="0">
-                <a:solidFill>
-                  <a:srgbClr val="00897B"/>
-                </a:solidFill>
-                <a:latin typeface="Calibri" pitchFamily="34" charset="0"/>
-                <a:ea typeface="Calibri" pitchFamily="34" charset="-122"/>
-                <a:cs typeface="Calibri" pitchFamily="34" charset="-120"/>
-              </a:rPr>
-              <a:t>In Progress</a:t>
-            </a:r>
-          </a:p>
-          <a:p>
-            <a:pPr marL="0" indent="0">
-              <a:lnSpc>
-                <a:spcPct val="120000"/>
-              </a:lnSpc>
-              <a:buNone/>
-            </a:pPr>
-            <a:endParaRPr lang="en-US" sz="650" b="1" kern="0" spc="200" dirty="0">
-              <a:solidFill>
-                <a:srgbClr val="00897B"/>
-              </a:solidFill>
-              <a:latin typeface="Calibri" pitchFamily="34" charset="0"/>
-              <a:ea typeface="Calibri" pitchFamily="34" charset="-122"/>
-              <a:cs typeface="Calibri" pitchFamily="34" charset="-120"/>
-            </a:endParaRPr>
-          </a:p>
-          <a:p>
-            <a:pPr marL="0" indent="0">
-              <a:lnSpc>
-                <a:spcPct val="120000"/>
-              </a:lnSpc>
-              <a:buNone/>
-            </a:pPr>
             <a:endParaRPr lang="en-US" sz="650" dirty="0"/>
           </a:p>
         </p:txBody>
@@ -7678,6 +7720,3395 @@
       <p:sp>
         <p:nvSpPr>
           <p:cNvPr id="62" name="Shape 57"/>
+          <p:cNvSpPr/>
+          <p:nvPr/>
+        </p:nvSpPr>
+        <p:spPr>
+          <a:xfrm>
+            <a:off x="0" y="5106924"/>
+            <a:ext cx="9144000" cy="36576"/>
+          </a:xfrm>
+          <a:prstGeom prst="rect">
+            <a:avLst/>
+          </a:prstGeom>
+          <a:solidFill>
+            <a:srgbClr val="D71E28"/>
+          </a:solidFill>
+          <a:ln/>
+        </p:spPr>
+        <p:txBody>
+          <a:bodyPr/>
+          <a:lstStyle/>
+          <a:p>
+            <a:endParaRPr lang="en-US"/>
+          </a:p>
+        </p:txBody>
+      </p:sp>
+    </p:spTree>
+  </p:cSld>
+  <p:clrMapOvr>
+    <a:masterClrMapping/>
+  </p:clrMapOvr>
+</p:sld>
+</file>
+
+<file path=ppt/slides/slide4.xml><?xml version="1.0" encoding="utf-8"?>
+<p:sld xmlns:a="http://schemas.openxmlformats.org/drawingml/2006/main" xmlns:r="http://schemas.openxmlformats.org/officeDocument/2006/relationships" xmlns:p="http://schemas.openxmlformats.org/presentationml/2006/main">
+  <p:cSld name="Slide 4">
+    <p:bg>
+      <p:bgPr>
+        <a:solidFill>
+          <a:srgbClr val="FFFFFF"/>
+        </a:solidFill>
+        <a:effectLst/>
+      </p:bgPr>
+    </p:bg>
+    <p:spTree>
+      <p:nvGrpSpPr>
+        <p:cNvPr id="1" name=""/>
+        <p:cNvGrpSpPr/>
+        <p:nvPr/>
+      </p:nvGrpSpPr>
+      <p:grpSpPr>
+        <a:xfrm>
+          <a:off x="0" y="0"/>
+          <a:ext cx="0" cy="0"/>
+          <a:chOff x="0" y="0"/>
+          <a:chExt cx="0" cy="0"/>
+        </a:xfrm>
+      </p:grpSpPr>
+      <p:sp>
+        <p:nvSpPr>
+          <p:cNvPr id="2" name="Shape 0"/>
+          <p:cNvSpPr/>
+          <p:nvPr/>
+        </p:nvSpPr>
+        <p:spPr>
+          <a:xfrm>
+            <a:off x="0" y="0"/>
+            <a:ext cx="9144000" cy="36576"/>
+          </a:xfrm>
+          <a:prstGeom prst="rect">
+            <a:avLst/>
+          </a:prstGeom>
+          <a:solidFill>
+            <a:srgbClr val="D71E28"/>
+          </a:solidFill>
+          <a:ln/>
+        </p:spPr>
+        <p:txBody>
+          <a:bodyPr/>
+          <a:lstStyle/>
+          <a:p>
+            <a:endParaRPr lang="en-US"/>
+          </a:p>
+        </p:txBody>
+      </p:sp>
+      <p:sp>
+        <p:nvSpPr>
+          <p:cNvPr id="3" name="Text 1"/>
+          <p:cNvSpPr/>
+          <p:nvPr/>
+        </p:nvSpPr>
+        <p:spPr>
+          <a:xfrm>
+            <a:off x="548640" y="128016"/>
+            <a:ext cx="8046720" cy="420624"/>
+          </a:xfrm>
+          <a:prstGeom prst="rect">
+            <a:avLst/>
+          </a:prstGeom>
+          <a:noFill/>
+          <a:ln/>
+        </p:spPr>
+        <p:txBody>
+          <a:bodyPr wrap="square" lIns="0" tIns="0" rIns="0" bIns="0" rtlCol="0" anchor="ctr"/>
+          <a:lstStyle/>
+          <a:p>
+            <a:pPr marL="0" indent="0">
+              <a:buNone/>
+            </a:pPr>
+            <a:r>
+              <a:rPr lang="en-US" sz="2000" b="1" dirty="0">
+                <a:solidFill>
+                  <a:srgbClr val="1A1A2E"/>
+                </a:solidFill>
+                <a:latin typeface="Calibri Light" pitchFamily="34" charset="0"/>
+                <a:ea typeface="Calibri Light" pitchFamily="34" charset="-122"/>
+                <a:cs typeface="Calibri Light" pitchFamily="34" charset="-120"/>
+              </a:rPr>
+              <a:t>How It Works</a:t>
+            </a:r>
+            <a:endParaRPr lang="en-US" sz="2000" dirty="0"/>
+          </a:p>
+        </p:txBody>
+      </p:sp>
+      <p:sp>
+        <p:nvSpPr>
+          <p:cNvPr id="4" name="Shape 2"/>
+          <p:cNvSpPr/>
+          <p:nvPr/>
+        </p:nvSpPr>
+        <p:spPr>
+          <a:xfrm>
+            <a:off x="548640" y="585216"/>
+            <a:ext cx="8046720" cy="0"/>
+          </a:xfrm>
+          <a:prstGeom prst="line">
+            <a:avLst/>
+          </a:prstGeom>
+          <a:noFill/>
+          <a:ln w="9525">
+            <a:solidFill>
+              <a:srgbClr val="E8E8E8"/>
+            </a:solidFill>
+            <a:prstDash val="solid"/>
+          </a:ln>
+        </p:spPr>
+        <p:txBody>
+          <a:bodyPr/>
+          <a:lstStyle/>
+          <a:p>
+            <a:endParaRPr lang="en-US"/>
+          </a:p>
+        </p:txBody>
+      </p:sp>
+      <p:sp>
+        <p:nvSpPr>
+          <p:cNvPr id="5" name="Text 3"/>
+          <p:cNvSpPr/>
+          <p:nvPr/>
+        </p:nvSpPr>
+        <p:spPr>
+          <a:xfrm>
+            <a:off x="548640" y="841248"/>
+            <a:ext cx="3657600" cy="164592"/>
+          </a:xfrm>
+          <a:prstGeom prst="rect">
+            <a:avLst/>
+          </a:prstGeom>
+          <a:noFill/>
+          <a:ln/>
+        </p:spPr>
+        <p:txBody>
+          <a:bodyPr wrap="square" lIns="0" tIns="0" rIns="0" bIns="0" rtlCol="0" anchor="ctr"/>
+          <a:lstStyle/>
+          <a:p>
+            <a:pPr marL="0" indent="0">
+              <a:buNone/>
+            </a:pPr>
+            <a:r>
+              <a:rPr lang="en-US" sz="700" b="1" kern="0" spc="200" dirty="0">
+                <a:solidFill>
+                  <a:srgbClr val="00897B"/>
+                </a:solidFill>
+                <a:latin typeface="Calibri" pitchFamily="34" charset="0"/>
+                <a:ea typeface="Calibri" pitchFamily="34" charset="-122"/>
+                <a:cs typeface="Calibri" pitchFamily="34" charset="-120"/>
+              </a:rPr>
+              <a:t>SERVICE  PROVIDER  ONBOARDING</a:t>
+            </a:r>
+            <a:endParaRPr lang="en-US" sz="700" dirty="0"/>
+          </a:p>
+        </p:txBody>
+      </p:sp>
+      <p:sp>
+        <p:nvSpPr>
+          <p:cNvPr id="6" name="Shape 4"/>
+          <p:cNvSpPr/>
+          <p:nvPr/>
+        </p:nvSpPr>
+        <p:spPr>
+          <a:xfrm>
+            <a:off x="640080" y="1371600"/>
+            <a:ext cx="1243584" cy="512064"/>
+          </a:xfrm>
+          <a:prstGeom prst="rect">
+            <a:avLst/>
+          </a:prstGeom>
+          <a:solidFill>
+            <a:srgbClr val="F5F5F5"/>
+          </a:solidFill>
+          <a:ln w="6350">
+            <a:solidFill>
+              <a:srgbClr val="E8E8E8"/>
+            </a:solidFill>
+            <a:prstDash val="solid"/>
+          </a:ln>
+          <a:effectLst>
+            <a:outerShdw blurRad="38100" dist="12700" dir="8100000" algn="bl" rotWithShape="0">
+              <a:srgbClr val="000000">
+                <a:alpha val="6000"/>
+              </a:srgbClr>
+            </a:outerShdw>
+          </a:effectLst>
+        </p:spPr>
+        <p:txBody>
+          <a:bodyPr/>
+          <a:lstStyle/>
+          <a:p>
+            <a:endParaRPr lang="en-US"/>
+          </a:p>
+        </p:txBody>
+      </p:sp>
+      <p:sp>
+        <p:nvSpPr>
+          <p:cNvPr id="7" name="Shape 5"/>
+          <p:cNvSpPr/>
+          <p:nvPr/>
+        </p:nvSpPr>
+        <p:spPr>
+          <a:xfrm>
+            <a:off x="640080" y="1371600"/>
+            <a:ext cx="1243584" cy="27432"/>
+          </a:xfrm>
+          <a:prstGeom prst="rect">
+            <a:avLst/>
+          </a:prstGeom>
+          <a:solidFill>
+            <a:srgbClr val="00897B"/>
+          </a:solidFill>
+          <a:ln/>
+        </p:spPr>
+        <p:txBody>
+          <a:bodyPr/>
+          <a:lstStyle/>
+          <a:p>
+            <a:endParaRPr lang="en-US"/>
+          </a:p>
+        </p:txBody>
+      </p:sp>
+      <p:sp>
+        <p:nvSpPr>
+          <p:cNvPr id="8" name="Text 6"/>
+          <p:cNvSpPr/>
+          <p:nvPr/>
+        </p:nvSpPr>
+        <p:spPr>
+          <a:xfrm>
+            <a:off x="694944" y="1426464"/>
+            <a:ext cx="1133856" cy="201168"/>
+          </a:xfrm>
+          <a:prstGeom prst="rect">
+            <a:avLst/>
+          </a:prstGeom>
+          <a:noFill/>
+          <a:ln/>
+        </p:spPr>
+        <p:txBody>
+          <a:bodyPr wrap="square" lIns="0" tIns="0" rIns="0" bIns="0" rtlCol="0" anchor="ctr"/>
+          <a:lstStyle/>
+          <a:p>
+            <a:pPr marL="0" indent="0">
+              <a:buNone/>
+            </a:pPr>
+            <a:r>
+              <a:rPr lang="en-US" sz="900" b="1" dirty="0">
+                <a:solidFill>
+                  <a:srgbClr val="263238"/>
+                </a:solidFill>
+                <a:latin typeface="Calibri" pitchFamily="34" charset="0"/>
+                <a:ea typeface="Calibri" pitchFamily="34" charset="-122"/>
+                <a:cs typeface="Calibri" pitchFamily="34" charset="-120"/>
+              </a:rPr>
+              <a:t>Submit</a:t>
+            </a:r>
+            <a:endParaRPr lang="en-US" sz="900" dirty="0"/>
+          </a:p>
+        </p:txBody>
+      </p:sp>
+      <p:sp>
+        <p:nvSpPr>
+          <p:cNvPr id="9" name="Text 7"/>
+          <p:cNvSpPr/>
+          <p:nvPr/>
+        </p:nvSpPr>
+        <p:spPr>
+          <a:xfrm>
+            <a:off x="694944" y="1627632"/>
+            <a:ext cx="1133856" cy="201168"/>
+          </a:xfrm>
+          <a:prstGeom prst="rect">
+            <a:avLst/>
+          </a:prstGeom>
+          <a:noFill/>
+          <a:ln/>
+        </p:spPr>
+        <p:txBody>
+          <a:bodyPr wrap="square" lIns="0" tIns="0" rIns="0" bIns="0" rtlCol="0" anchor="t"/>
+          <a:lstStyle/>
+          <a:p>
+            <a:pPr marL="0" indent="0">
+              <a:buNone/>
+            </a:pPr>
+            <a:r>
+              <a:rPr lang="en-US" sz="650" dirty="0">
+                <a:solidFill>
+                  <a:srgbClr val="78909C"/>
+                </a:solidFill>
+                <a:latin typeface="Calibri" pitchFamily="34" charset="0"/>
+                <a:ea typeface="Calibri" pitchFamily="34" charset="-122"/>
+                <a:cs typeface="Calibri" pitchFamily="34" charset="-120"/>
+              </a:rPr>
+              <a:t>Service team submits</a:t>
+            </a:r>
+            <a:endParaRPr lang="en-US" sz="650" dirty="0"/>
+          </a:p>
+          <a:p>
+            <a:pPr marL="0" indent="0">
+              <a:buNone/>
+            </a:pPr>
+            <a:r>
+              <a:rPr lang="en-US" sz="650" dirty="0">
+                <a:solidFill>
+                  <a:srgbClr val="78909C"/>
+                </a:solidFill>
+                <a:latin typeface="Calibri" pitchFamily="34" charset="0"/>
+                <a:ea typeface="Calibri" pitchFamily="34" charset="-122"/>
+                <a:cs typeface="Calibri" pitchFamily="34" charset="-120"/>
+              </a:rPr>
+              <a:t>agent proposal &amp; use case</a:t>
+            </a:r>
+            <a:endParaRPr lang="en-US" sz="650" dirty="0"/>
+          </a:p>
+        </p:txBody>
+      </p:sp>
+      <p:sp>
+        <p:nvSpPr>
+          <p:cNvPr id="10" name="Shape 8"/>
+          <p:cNvSpPr/>
+          <p:nvPr/>
+        </p:nvSpPr>
+        <p:spPr>
+          <a:xfrm>
+            <a:off x="2176272" y="1371600"/>
+            <a:ext cx="1243584" cy="512064"/>
+          </a:xfrm>
+          <a:prstGeom prst="rect">
+            <a:avLst/>
+          </a:prstGeom>
+          <a:solidFill>
+            <a:srgbClr val="F5F5F5"/>
+          </a:solidFill>
+          <a:ln w="6350">
+            <a:solidFill>
+              <a:srgbClr val="E8E8E8"/>
+            </a:solidFill>
+            <a:prstDash val="solid"/>
+          </a:ln>
+          <a:effectLst>
+            <a:outerShdw blurRad="38100" dist="12700" dir="8100000" algn="bl" rotWithShape="0">
+              <a:srgbClr val="000000">
+                <a:alpha val="6000"/>
+              </a:srgbClr>
+            </a:outerShdw>
+          </a:effectLst>
+        </p:spPr>
+        <p:txBody>
+          <a:bodyPr/>
+          <a:lstStyle/>
+          <a:p>
+            <a:endParaRPr lang="en-US"/>
+          </a:p>
+        </p:txBody>
+      </p:sp>
+      <p:sp>
+        <p:nvSpPr>
+          <p:cNvPr id="11" name="Shape 9"/>
+          <p:cNvSpPr/>
+          <p:nvPr/>
+        </p:nvSpPr>
+        <p:spPr>
+          <a:xfrm>
+            <a:off x="2176272" y="1371600"/>
+            <a:ext cx="1243584" cy="27432"/>
+          </a:xfrm>
+          <a:prstGeom prst="rect">
+            <a:avLst/>
+          </a:prstGeom>
+          <a:solidFill>
+            <a:srgbClr val="00897B"/>
+          </a:solidFill>
+          <a:ln/>
+        </p:spPr>
+        <p:txBody>
+          <a:bodyPr/>
+          <a:lstStyle/>
+          <a:p>
+            <a:endParaRPr lang="en-US"/>
+          </a:p>
+        </p:txBody>
+      </p:sp>
+      <p:sp>
+        <p:nvSpPr>
+          <p:cNvPr id="12" name="Text 10"/>
+          <p:cNvSpPr/>
+          <p:nvPr/>
+        </p:nvSpPr>
+        <p:spPr>
+          <a:xfrm>
+            <a:off x="2231136" y="1426464"/>
+            <a:ext cx="1133856" cy="201168"/>
+          </a:xfrm>
+          <a:prstGeom prst="rect">
+            <a:avLst/>
+          </a:prstGeom>
+          <a:noFill/>
+          <a:ln/>
+        </p:spPr>
+        <p:txBody>
+          <a:bodyPr wrap="square" lIns="0" tIns="0" rIns="0" bIns="0" rtlCol="0" anchor="ctr"/>
+          <a:lstStyle/>
+          <a:p>
+            <a:pPr marL="0" indent="0">
+              <a:buNone/>
+            </a:pPr>
+            <a:r>
+              <a:rPr lang="en-US" sz="900" b="1" dirty="0">
+                <a:solidFill>
+                  <a:srgbClr val="263238"/>
+                </a:solidFill>
+                <a:latin typeface="Calibri" pitchFamily="34" charset="0"/>
+                <a:ea typeface="Calibri" pitchFamily="34" charset="-122"/>
+                <a:cs typeface="Calibri" pitchFamily="34" charset="-120"/>
+              </a:rPr>
+              <a:t>Review</a:t>
+            </a:r>
+            <a:endParaRPr lang="en-US" sz="900" dirty="0"/>
+          </a:p>
+        </p:txBody>
+      </p:sp>
+      <p:sp>
+        <p:nvSpPr>
+          <p:cNvPr id="13" name="Text 11"/>
+          <p:cNvSpPr/>
+          <p:nvPr/>
+        </p:nvSpPr>
+        <p:spPr>
+          <a:xfrm>
+            <a:off x="2231136" y="1627632"/>
+            <a:ext cx="1133856" cy="201168"/>
+          </a:xfrm>
+          <a:prstGeom prst="rect">
+            <a:avLst/>
+          </a:prstGeom>
+          <a:noFill/>
+          <a:ln/>
+        </p:spPr>
+        <p:txBody>
+          <a:bodyPr wrap="square" lIns="0" tIns="0" rIns="0" bIns="0" rtlCol="0" anchor="t"/>
+          <a:lstStyle/>
+          <a:p>
+            <a:pPr marL="0" indent="0">
+              <a:buNone/>
+            </a:pPr>
+            <a:r>
+              <a:rPr lang="en-US" sz="650" dirty="0">
+                <a:solidFill>
+                  <a:srgbClr val="78909C"/>
+                </a:solidFill>
+                <a:latin typeface="Calibri" pitchFamily="34" charset="0"/>
+                <a:ea typeface="Calibri" pitchFamily="34" charset="-122"/>
+                <a:cs typeface="Calibri" pitchFamily="34" charset="-120"/>
+              </a:rPr>
+              <a:t>Dual-gate review:</a:t>
+            </a:r>
+            <a:endParaRPr lang="en-US" sz="650" dirty="0"/>
+          </a:p>
+          <a:p>
+            <a:pPr marL="0" indent="0">
+              <a:buNone/>
+            </a:pPr>
+            <a:r>
+              <a:rPr lang="en-US" sz="650" dirty="0">
+                <a:solidFill>
+                  <a:srgbClr val="78909C"/>
+                </a:solidFill>
+                <a:latin typeface="Calibri" pitchFamily="34" charset="0"/>
+                <a:ea typeface="Calibri" pitchFamily="34" charset="-122"/>
+                <a:cs typeface="Calibri" pitchFamily="34" charset="-120"/>
+              </a:rPr>
+              <a:t>content &amp; functional</a:t>
+            </a:r>
+            <a:endParaRPr lang="en-US" sz="650" dirty="0"/>
+          </a:p>
+        </p:txBody>
+      </p:sp>
+      <p:sp>
+        <p:nvSpPr>
+          <p:cNvPr id="14" name="Shape 12"/>
+          <p:cNvSpPr/>
+          <p:nvPr/>
+        </p:nvSpPr>
+        <p:spPr>
+          <a:xfrm>
+            <a:off x="3712464" y="1371600"/>
+            <a:ext cx="1243584" cy="512064"/>
+          </a:xfrm>
+          <a:prstGeom prst="rect">
+            <a:avLst/>
+          </a:prstGeom>
+          <a:solidFill>
+            <a:srgbClr val="F5F5F5"/>
+          </a:solidFill>
+          <a:ln w="6350">
+            <a:solidFill>
+              <a:srgbClr val="E8E8E8"/>
+            </a:solidFill>
+            <a:prstDash val="solid"/>
+          </a:ln>
+          <a:effectLst>
+            <a:outerShdw blurRad="38100" dist="12700" dir="8100000" algn="bl" rotWithShape="0">
+              <a:srgbClr val="000000">
+                <a:alpha val="6000"/>
+              </a:srgbClr>
+            </a:outerShdw>
+          </a:effectLst>
+        </p:spPr>
+        <p:txBody>
+          <a:bodyPr/>
+          <a:lstStyle/>
+          <a:p>
+            <a:endParaRPr lang="en-US"/>
+          </a:p>
+        </p:txBody>
+      </p:sp>
+      <p:sp>
+        <p:nvSpPr>
+          <p:cNvPr id="15" name="Shape 13"/>
+          <p:cNvSpPr/>
+          <p:nvPr/>
+        </p:nvSpPr>
+        <p:spPr>
+          <a:xfrm>
+            <a:off x="3712464" y="1371600"/>
+            <a:ext cx="1243584" cy="27432"/>
+          </a:xfrm>
+          <a:prstGeom prst="rect">
+            <a:avLst/>
+          </a:prstGeom>
+          <a:solidFill>
+            <a:srgbClr val="00897B"/>
+          </a:solidFill>
+          <a:ln/>
+        </p:spPr>
+        <p:txBody>
+          <a:bodyPr/>
+          <a:lstStyle/>
+          <a:p>
+            <a:endParaRPr lang="en-US"/>
+          </a:p>
+        </p:txBody>
+      </p:sp>
+      <p:sp>
+        <p:nvSpPr>
+          <p:cNvPr id="16" name="Text 14"/>
+          <p:cNvSpPr/>
+          <p:nvPr/>
+        </p:nvSpPr>
+        <p:spPr>
+          <a:xfrm>
+            <a:off x="3767328" y="1426464"/>
+            <a:ext cx="1133856" cy="201168"/>
+          </a:xfrm>
+          <a:prstGeom prst="rect">
+            <a:avLst/>
+          </a:prstGeom>
+          <a:noFill/>
+          <a:ln/>
+        </p:spPr>
+        <p:txBody>
+          <a:bodyPr wrap="square" lIns="0" tIns="0" rIns="0" bIns="0" rtlCol="0" anchor="ctr"/>
+          <a:lstStyle/>
+          <a:p>
+            <a:pPr marL="0" indent="0">
+              <a:buNone/>
+            </a:pPr>
+            <a:r>
+              <a:rPr lang="en-US" sz="900" b="1" dirty="0">
+                <a:solidFill>
+                  <a:srgbClr val="263238"/>
+                </a:solidFill>
+                <a:latin typeface="Calibri" pitchFamily="34" charset="0"/>
+                <a:ea typeface="Calibri" pitchFamily="34" charset="-122"/>
+                <a:cs typeface="Calibri" pitchFamily="34" charset="-120"/>
+              </a:rPr>
+              <a:t>Approve</a:t>
+            </a:r>
+            <a:endParaRPr lang="en-US" sz="900" dirty="0"/>
+          </a:p>
+        </p:txBody>
+      </p:sp>
+      <p:sp>
+        <p:nvSpPr>
+          <p:cNvPr id="17" name="Text 15"/>
+          <p:cNvSpPr/>
+          <p:nvPr/>
+        </p:nvSpPr>
+        <p:spPr>
+          <a:xfrm>
+            <a:off x="3767328" y="1627632"/>
+            <a:ext cx="1133856" cy="201168"/>
+          </a:xfrm>
+          <a:prstGeom prst="rect">
+            <a:avLst/>
+          </a:prstGeom>
+          <a:noFill/>
+          <a:ln/>
+        </p:spPr>
+        <p:txBody>
+          <a:bodyPr wrap="square" lIns="0" tIns="0" rIns="0" bIns="0" rtlCol="0" anchor="t"/>
+          <a:lstStyle/>
+          <a:p>
+            <a:pPr marL="0" indent="0">
+              <a:buNone/>
+            </a:pPr>
+            <a:r>
+              <a:rPr lang="en-US" sz="650" dirty="0">
+                <a:solidFill>
+                  <a:srgbClr val="78909C"/>
+                </a:solidFill>
+                <a:latin typeface="Calibri" pitchFamily="34" charset="0"/>
+                <a:ea typeface="Calibri" pitchFamily="34" charset="-122"/>
+                <a:cs typeface="Calibri" pitchFamily="34" charset="-120"/>
+              </a:rPr>
+              <a:t>Agent approved for</a:t>
+            </a:r>
+            <a:endParaRPr lang="en-US" sz="650" dirty="0"/>
+          </a:p>
+          <a:p>
+            <a:pPr marL="0" indent="0">
+              <a:buNone/>
+            </a:pPr>
+            <a:r>
+              <a:rPr lang="en-US" sz="650" dirty="0">
+                <a:solidFill>
+                  <a:srgbClr val="78909C"/>
+                </a:solidFill>
+                <a:latin typeface="Calibri" pitchFamily="34" charset="0"/>
+                <a:ea typeface="Calibri" pitchFamily="34" charset="-122"/>
+                <a:cs typeface="Calibri" pitchFamily="34" charset="-120"/>
+              </a:rPr>
+              <a:t>integration into framework</a:t>
+            </a:r>
+            <a:endParaRPr lang="en-US" sz="650" dirty="0"/>
+          </a:p>
+        </p:txBody>
+      </p:sp>
+      <p:sp>
+        <p:nvSpPr>
+          <p:cNvPr id="18" name="Shape 16"/>
+          <p:cNvSpPr/>
+          <p:nvPr/>
+        </p:nvSpPr>
+        <p:spPr>
+          <a:xfrm>
+            <a:off x="5248656" y="1371600"/>
+            <a:ext cx="1243584" cy="512064"/>
+          </a:xfrm>
+          <a:prstGeom prst="rect">
+            <a:avLst/>
+          </a:prstGeom>
+          <a:solidFill>
+            <a:srgbClr val="F5F5F5"/>
+          </a:solidFill>
+          <a:ln w="6350">
+            <a:solidFill>
+              <a:srgbClr val="E8E8E8"/>
+            </a:solidFill>
+            <a:prstDash val="solid"/>
+          </a:ln>
+          <a:effectLst>
+            <a:outerShdw blurRad="38100" dist="12700" dir="8100000" algn="bl" rotWithShape="0">
+              <a:srgbClr val="000000">
+                <a:alpha val="6000"/>
+              </a:srgbClr>
+            </a:outerShdw>
+          </a:effectLst>
+        </p:spPr>
+        <p:txBody>
+          <a:bodyPr/>
+          <a:lstStyle/>
+          <a:p>
+            <a:endParaRPr lang="en-US"/>
+          </a:p>
+        </p:txBody>
+      </p:sp>
+      <p:sp>
+        <p:nvSpPr>
+          <p:cNvPr id="19" name="Shape 17"/>
+          <p:cNvSpPr/>
+          <p:nvPr/>
+        </p:nvSpPr>
+        <p:spPr>
+          <a:xfrm>
+            <a:off x="5248656" y="1371600"/>
+            <a:ext cx="1243584" cy="27432"/>
+          </a:xfrm>
+          <a:prstGeom prst="rect">
+            <a:avLst/>
+          </a:prstGeom>
+          <a:solidFill>
+            <a:srgbClr val="00897B"/>
+          </a:solidFill>
+          <a:ln/>
+        </p:spPr>
+        <p:txBody>
+          <a:bodyPr/>
+          <a:lstStyle/>
+          <a:p>
+            <a:endParaRPr lang="en-US"/>
+          </a:p>
+        </p:txBody>
+      </p:sp>
+      <p:sp>
+        <p:nvSpPr>
+          <p:cNvPr id="20" name="Text 18"/>
+          <p:cNvSpPr/>
+          <p:nvPr/>
+        </p:nvSpPr>
+        <p:spPr>
+          <a:xfrm>
+            <a:off x="5303520" y="1426464"/>
+            <a:ext cx="1133856" cy="201168"/>
+          </a:xfrm>
+          <a:prstGeom prst="rect">
+            <a:avLst/>
+          </a:prstGeom>
+          <a:noFill/>
+          <a:ln/>
+        </p:spPr>
+        <p:txBody>
+          <a:bodyPr wrap="square" lIns="0" tIns="0" rIns="0" bIns="0" rtlCol="0" anchor="ctr"/>
+          <a:lstStyle/>
+          <a:p>
+            <a:pPr marL="0" indent="0">
+              <a:buNone/>
+            </a:pPr>
+            <a:r>
+              <a:rPr lang="en-US" sz="900" b="1" dirty="0">
+                <a:solidFill>
+                  <a:srgbClr val="263238"/>
+                </a:solidFill>
+                <a:latin typeface="Calibri" pitchFamily="34" charset="0"/>
+                <a:ea typeface="Calibri" pitchFamily="34" charset="-122"/>
+                <a:cs typeface="Calibri" pitchFamily="34" charset="-120"/>
+              </a:rPr>
+              <a:t>Integrate</a:t>
+            </a:r>
+            <a:endParaRPr lang="en-US" sz="900" dirty="0"/>
+          </a:p>
+        </p:txBody>
+      </p:sp>
+      <p:sp>
+        <p:nvSpPr>
+          <p:cNvPr id="21" name="Text 19"/>
+          <p:cNvSpPr/>
+          <p:nvPr/>
+        </p:nvSpPr>
+        <p:spPr>
+          <a:xfrm>
+            <a:off x="5303520" y="1627632"/>
+            <a:ext cx="1133856" cy="201168"/>
+          </a:xfrm>
+          <a:prstGeom prst="rect">
+            <a:avLst/>
+          </a:prstGeom>
+          <a:noFill/>
+          <a:ln/>
+        </p:spPr>
+        <p:txBody>
+          <a:bodyPr wrap="square" lIns="0" tIns="0" rIns="0" bIns="0" rtlCol="0" anchor="t"/>
+          <a:lstStyle/>
+          <a:p>
+            <a:pPr marL="0" indent="0">
+              <a:buNone/>
+            </a:pPr>
+            <a:r>
+              <a:rPr lang="en-US" sz="650" dirty="0">
+                <a:solidFill>
+                  <a:srgbClr val="78909C"/>
+                </a:solidFill>
+                <a:latin typeface="Calibri" pitchFamily="34" charset="0"/>
+                <a:ea typeface="Calibri" pitchFamily="34" charset="-122"/>
+                <a:cs typeface="Calibri" pitchFamily="34" charset="-120"/>
+              </a:rPr>
+              <a:t>MCP &amp; documentation</a:t>
+            </a:r>
+            <a:endParaRPr lang="en-US" sz="650" dirty="0"/>
+          </a:p>
+          <a:p>
+            <a:pPr marL="0" indent="0">
+              <a:buNone/>
+            </a:pPr>
+            <a:r>
+              <a:rPr lang="en-US" sz="650" dirty="0">
+                <a:solidFill>
+                  <a:srgbClr val="78909C"/>
+                </a:solidFill>
+                <a:latin typeface="Calibri" pitchFamily="34" charset="0"/>
+                <a:ea typeface="Calibri" pitchFamily="34" charset="-122"/>
+                <a:cs typeface="Calibri" pitchFamily="34" charset="-120"/>
+              </a:rPr>
+              <a:t>onboarding paths</a:t>
+            </a:r>
+            <a:endParaRPr lang="en-US" sz="650" dirty="0"/>
+          </a:p>
+        </p:txBody>
+      </p:sp>
+      <p:sp>
+        <p:nvSpPr>
+          <p:cNvPr id="22" name="Shape 20"/>
+          <p:cNvSpPr/>
+          <p:nvPr/>
+        </p:nvSpPr>
+        <p:spPr>
+          <a:xfrm>
+            <a:off x="6784848" y="1371600"/>
+            <a:ext cx="1243584" cy="512064"/>
+          </a:xfrm>
+          <a:prstGeom prst="rect">
+            <a:avLst/>
+          </a:prstGeom>
+          <a:solidFill>
+            <a:srgbClr val="F5F5F5"/>
+          </a:solidFill>
+          <a:ln w="6350">
+            <a:solidFill>
+              <a:srgbClr val="E8E8E8"/>
+            </a:solidFill>
+            <a:prstDash val="solid"/>
+          </a:ln>
+          <a:effectLst>
+            <a:outerShdw blurRad="38100" dist="12700" dir="8100000" algn="bl" rotWithShape="0">
+              <a:srgbClr val="000000">
+                <a:alpha val="6000"/>
+              </a:srgbClr>
+            </a:outerShdw>
+          </a:effectLst>
+        </p:spPr>
+        <p:txBody>
+          <a:bodyPr/>
+          <a:lstStyle/>
+          <a:p>
+            <a:endParaRPr lang="en-US"/>
+          </a:p>
+        </p:txBody>
+      </p:sp>
+      <p:sp>
+        <p:nvSpPr>
+          <p:cNvPr id="23" name="Shape 21"/>
+          <p:cNvSpPr/>
+          <p:nvPr/>
+        </p:nvSpPr>
+        <p:spPr>
+          <a:xfrm>
+            <a:off x="6784848" y="1371600"/>
+            <a:ext cx="1243584" cy="27432"/>
+          </a:xfrm>
+          <a:prstGeom prst="rect">
+            <a:avLst/>
+          </a:prstGeom>
+          <a:solidFill>
+            <a:srgbClr val="00897B"/>
+          </a:solidFill>
+          <a:ln/>
+        </p:spPr>
+        <p:txBody>
+          <a:bodyPr/>
+          <a:lstStyle/>
+          <a:p>
+            <a:endParaRPr lang="en-US"/>
+          </a:p>
+        </p:txBody>
+      </p:sp>
+      <p:sp>
+        <p:nvSpPr>
+          <p:cNvPr id="24" name="Text 22"/>
+          <p:cNvSpPr/>
+          <p:nvPr/>
+        </p:nvSpPr>
+        <p:spPr>
+          <a:xfrm>
+            <a:off x="6839712" y="1426464"/>
+            <a:ext cx="1133856" cy="201168"/>
+          </a:xfrm>
+          <a:prstGeom prst="rect">
+            <a:avLst/>
+          </a:prstGeom>
+          <a:noFill/>
+          <a:ln/>
+        </p:spPr>
+        <p:txBody>
+          <a:bodyPr wrap="square" lIns="0" tIns="0" rIns="0" bIns="0" rtlCol="0" anchor="ctr"/>
+          <a:lstStyle/>
+          <a:p>
+            <a:pPr marL="0" indent="0">
+              <a:buNone/>
+            </a:pPr>
+            <a:r>
+              <a:rPr lang="en-US" sz="900" b="1" dirty="0">
+                <a:solidFill>
+                  <a:srgbClr val="263238"/>
+                </a:solidFill>
+                <a:latin typeface="Calibri" pitchFamily="34" charset="0"/>
+                <a:ea typeface="Calibri" pitchFamily="34" charset="-122"/>
+                <a:cs typeface="Calibri" pitchFamily="34" charset="-120"/>
+              </a:rPr>
+              <a:t>Evaluate</a:t>
+            </a:r>
+            <a:endParaRPr lang="en-US" sz="900" dirty="0"/>
+          </a:p>
+        </p:txBody>
+      </p:sp>
+      <p:sp>
+        <p:nvSpPr>
+          <p:cNvPr id="25" name="Text 23"/>
+          <p:cNvSpPr/>
+          <p:nvPr/>
+        </p:nvSpPr>
+        <p:spPr>
+          <a:xfrm>
+            <a:off x="6839712" y="1627632"/>
+            <a:ext cx="1133856" cy="201168"/>
+          </a:xfrm>
+          <a:prstGeom prst="rect">
+            <a:avLst/>
+          </a:prstGeom>
+          <a:noFill/>
+          <a:ln/>
+        </p:spPr>
+        <p:txBody>
+          <a:bodyPr wrap="square" lIns="0" tIns="0" rIns="0" bIns="0" rtlCol="0" anchor="t"/>
+          <a:lstStyle/>
+          <a:p>
+            <a:pPr marL="0" indent="0">
+              <a:buNone/>
+            </a:pPr>
+            <a:r>
+              <a:rPr lang="en-US" sz="650" dirty="0">
+                <a:solidFill>
+                  <a:srgbClr val="78909C"/>
+                </a:solidFill>
+                <a:latin typeface="Calibri" pitchFamily="34" charset="0"/>
+                <a:ea typeface="Calibri" pitchFamily="34" charset="-122"/>
+                <a:cs typeface="Calibri" pitchFamily="34" charset="-120"/>
+              </a:rPr>
+              <a:t>Quality, hallucination &amp;</a:t>
+            </a:r>
+            <a:endParaRPr lang="en-US" sz="650" dirty="0"/>
+          </a:p>
+          <a:p>
+            <a:pPr marL="0" indent="0">
+              <a:buNone/>
+            </a:pPr>
+            <a:r>
+              <a:rPr lang="en-US" sz="650" dirty="0">
+                <a:solidFill>
+                  <a:srgbClr val="78909C"/>
+                </a:solidFill>
+                <a:latin typeface="Calibri" pitchFamily="34" charset="0"/>
+                <a:ea typeface="Calibri" pitchFamily="34" charset="-122"/>
+                <a:cs typeface="Calibri" pitchFamily="34" charset="-120"/>
+              </a:rPr>
+              <a:t>performance validation</a:t>
+            </a:r>
+            <a:endParaRPr lang="en-US" sz="650" dirty="0"/>
+          </a:p>
+        </p:txBody>
+      </p:sp>
+      <p:sp>
+        <p:nvSpPr>
+          <p:cNvPr id="26" name="Shape 24"/>
+          <p:cNvSpPr/>
+          <p:nvPr/>
+        </p:nvSpPr>
+        <p:spPr>
+          <a:xfrm>
+            <a:off x="1920240" y="1627632"/>
+            <a:ext cx="219456" cy="0"/>
+          </a:xfrm>
+          <a:prstGeom prst="line">
+            <a:avLst/>
+          </a:prstGeom>
+          <a:noFill/>
+          <a:ln w="12700">
+            <a:solidFill>
+              <a:srgbClr val="00897B"/>
+            </a:solidFill>
+            <a:prstDash val="solid"/>
+            <a:tailEnd type="triangle"/>
+          </a:ln>
+        </p:spPr>
+        <p:txBody>
+          <a:bodyPr/>
+          <a:lstStyle/>
+          <a:p>
+            <a:endParaRPr lang="en-US"/>
+          </a:p>
+        </p:txBody>
+      </p:sp>
+      <p:sp>
+        <p:nvSpPr>
+          <p:cNvPr id="27" name="Shape 25"/>
+          <p:cNvSpPr/>
+          <p:nvPr/>
+        </p:nvSpPr>
+        <p:spPr>
+          <a:xfrm>
+            <a:off x="3456432" y="1627632"/>
+            <a:ext cx="219456" cy="0"/>
+          </a:xfrm>
+          <a:prstGeom prst="line">
+            <a:avLst/>
+          </a:prstGeom>
+          <a:noFill/>
+          <a:ln w="12700">
+            <a:solidFill>
+              <a:srgbClr val="00897B"/>
+            </a:solidFill>
+            <a:prstDash val="solid"/>
+            <a:tailEnd type="triangle"/>
+          </a:ln>
+        </p:spPr>
+        <p:txBody>
+          <a:bodyPr/>
+          <a:lstStyle/>
+          <a:p>
+            <a:endParaRPr lang="en-US"/>
+          </a:p>
+        </p:txBody>
+      </p:sp>
+      <p:sp>
+        <p:nvSpPr>
+          <p:cNvPr id="28" name="Shape 26"/>
+          <p:cNvSpPr/>
+          <p:nvPr/>
+        </p:nvSpPr>
+        <p:spPr>
+          <a:xfrm>
+            <a:off x="4992624" y="1627632"/>
+            <a:ext cx="219456" cy="0"/>
+          </a:xfrm>
+          <a:prstGeom prst="line">
+            <a:avLst/>
+          </a:prstGeom>
+          <a:noFill/>
+          <a:ln w="12700">
+            <a:solidFill>
+              <a:srgbClr val="00897B"/>
+            </a:solidFill>
+            <a:prstDash val="solid"/>
+            <a:tailEnd type="triangle"/>
+          </a:ln>
+        </p:spPr>
+        <p:txBody>
+          <a:bodyPr/>
+          <a:lstStyle/>
+          <a:p>
+            <a:endParaRPr lang="en-US"/>
+          </a:p>
+        </p:txBody>
+      </p:sp>
+      <p:sp>
+        <p:nvSpPr>
+          <p:cNvPr id="29" name="Shape 27"/>
+          <p:cNvSpPr/>
+          <p:nvPr/>
+        </p:nvSpPr>
+        <p:spPr>
+          <a:xfrm>
+            <a:off x="6528816" y="1627632"/>
+            <a:ext cx="219456" cy="0"/>
+          </a:xfrm>
+          <a:prstGeom prst="line">
+            <a:avLst/>
+          </a:prstGeom>
+          <a:noFill/>
+          <a:ln w="12700">
+            <a:solidFill>
+              <a:srgbClr val="00897B"/>
+            </a:solidFill>
+            <a:prstDash val="solid"/>
+            <a:tailEnd type="triangle"/>
+          </a:ln>
+        </p:spPr>
+        <p:txBody>
+          <a:bodyPr/>
+          <a:lstStyle/>
+          <a:p>
+            <a:endParaRPr lang="en-US"/>
+          </a:p>
+        </p:txBody>
+      </p:sp>
+      <p:sp>
+        <p:nvSpPr>
+          <p:cNvPr id="30" name="Shape 28"/>
+          <p:cNvSpPr/>
+          <p:nvPr/>
+        </p:nvSpPr>
+        <p:spPr>
+          <a:xfrm>
+            <a:off x="2798064" y="1883664"/>
+            <a:ext cx="0" cy="91440"/>
+          </a:xfrm>
+          <a:prstGeom prst="line">
+            <a:avLst/>
+          </a:prstGeom>
+          <a:noFill/>
+          <a:ln w="6350">
+            <a:solidFill>
+              <a:srgbClr val="E8E8E8"/>
+            </a:solidFill>
+            <a:prstDash val="dot"/>
+          </a:ln>
+        </p:spPr>
+        <p:txBody>
+          <a:bodyPr/>
+          <a:lstStyle/>
+          <a:p>
+            <a:endParaRPr lang="en-US"/>
+          </a:p>
+        </p:txBody>
+      </p:sp>
+      <p:sp>
+        <p:nvSpPr>
+          <p:cNvPr id="31" name="Shape 29"/>
+          <p:cNvSpPr/>
+          <p:nvPr/>
+        </p:nvSpPr>
+        <p:spPr>
+          <a:xfrm>
+            <a:off x="2176272" y="1975104"/>
+            <a:ext cx="566928" cy="128016"/>
+          </a:xfrm>
+          <a:prstGeom prst="roundRect">
+            <a:avLst>
+              <a:gd name="adj" fmla="val 14286"/>
+            </a:avLst>
+          </a:prstGeom>
+          <a:solidFill>
+            <a:srgbClr val="FAFAFA"/>
+          </a:solidFill>
+          <a:ln w="5080">
+            <a:solidFill>
+              <a:srgbClr val="E8E8E8"/>
+            </a:solidFill>
+            <a:prstDash val="solid"/>
+          </a:ln>
+        </p:spPr>
+        <p:txBody>
+          <a:bodyPr/>
+          <a:lstStyle/>
+          <a:p>
+            <a:endParaRPr lang="en-US"/>
+          </a:p>
+        </p:txBody>
+      </p:sp>
+      <p:sp>
+        <p:nvSpPr>
+          <p:cNvPr id="32" name="Text 30"/>
+          <p:cNvSpPr/>
+          <p:nvPr/>
+        </p:nvSpPr>
+        <p:spPr>
+          <a:xfrm>
+            <a:off x="2176272" y="1975104"/>
+            <a:ext cx="566928" cy="128016"/>
+          </a:xfrm>
+          <a:prstGeom prst="rect">
+            <a:avLst/>
+          </a:prstGeom>
+          <a:noFill/>
+          <a:ln/>
+        </p:spPr>
+        <p:txBody>
+          <a:bodyPr wrap="square" lIns="0" tIns="0" rIns="0" bIns="0" rtlCol="0" anchor="ctr"/>
+          <a:lstStyle/>
+          <a:p>
+            <a:pPr marL="0" indent="0" algn="ctr">
+              <a:buNone/>
+            </a:pPr>
+            <a:r>
+              <a:rPr lang="en-US" sz="550" b="1" dirty="0">
+                <a:solidFill>
+                  <a:srgbClr val="00897B"/>
+                </a:solidFill>
+                <a:latin typeface="Calibri" pitchFamily="34" charset="0"/>
+                <a:ea typeface="Calibri" pitchFamily="34" charset="-122"/>
+                <a:cs typeface="Calibri" pitchFamily="34" charset="-120"/>
+              </a:rPr>
+              <a:t>Content</a:t>
+            </a:r>
+            <a:endParaRPr lang="en-US" sz="550" dirty="0"/>
+          </a:p>
+        </p:txBody>
+      </p:sp>
+      <p:sp>
+        <p:nvSpPr>
+          <p:cNvPr id="33" name="Shape 31"/>
+          <p:cNvSpPr/>
+          <p:nvPr/>
+        </p:nvSpPr>
+        <p:spPr>
+          <a:xfrm>
+            <a:off x="2752344" y="2039112"/>
+            <a:ext cx="91440" cy="0"/>
+          </a:xfrm>
+          <a:prstGeom prst="line">
+            <a:avLst/>
+          </a:prstGeom>
+          <a:noFill/>
+          <a:ln w="7620">
+            <a:solidFill>
+              <a:srgbClr val="BDBDBD"/>
+            </a:solidFill>
+            <a:prstDash val="solid"/>
+            <a:tailEnd type="triangle"/>
+          </a:ln>
+        </p:spPr>
+        <p:txBody>
+          <a:bodyPr/>
+          <a:lstStyle/>
+          <a:p>
+            <a:endParaRPr lang="en-US"/>
+          </a:p>
+        </p:txBody>
+      </p:sp>
+      <p:sp>
+        <p:nvSpPr>
+          <p:cNvPr id="34" name="Shape 32"/>
+          <p:cNvSpPr/>
+          <p:nvPr/>
+        </p:nvSpPr>
+        <p:spPr>
+          <a:xfrm>
+            <a:off x="2852928" y="1975104"/>
+            <a:ext cx="566928" cy="128016"/>
+          </a:xfrm>
+          <a:prstGeom prst="roundRect">
+            <a:avLst>
+              <a:gd name="adj" fmla="val 14286"/>
+            </a:avLst>
+          </a:prstGeom>
+          <a:solidFill>
+            <a:srgbClr val="FAFAFA"/>
+          </a:solidFill>
+          <a:ln w="5080">
+            <a:solidFill>
+              <a:srgbClr val="E8E8E8"/>
+            </a:solidFill>
+            <a:prstDash val="solid"/>
+          </a:ln>
+        </p:spPr>
+        <p:txBody>
+          <a:bodyPr/>
+          <a:lstStyle/>
+          <a:p>
+            <a:endParaRPr lang="en-US"/>
+          </a:p>
+        </p:txBody>
+      </p:sp>
+      <p:sp>
+        <p:nvSpPr>
+          <p:cNvPr id="35" name="Text 33"/>
+          <p:cNvSpPr/>
+          <p:nvPr/>
+        </p:nvSpPr>
+        <p:spPr>
+          <a:xfrm>
+            <a:off x="2852928" y="1975104"/>
+            <a:ext cx="566928" cy="128016"/>
+          </a:xfrm>
+          <a:prstGeom prst="rect">
+            <a:avLst/>
+          </a:prstGeom>
+          <a:noFill/>
+          <a:ln/>
+        </p:spPr>
+        <p:txBody>
+          <a:bodyPr wrap="square" lIns="0" tIns="0" rIns="0" bIns="0" rtlCol="0" anchor="ctr"/>
+          <a:lstStyle/>
+          <a:p>
+            <a:pPr marL="0" indent="0" algn="ctr">
+              <a:buNone/>
+            </a:pPr>
+            <a:r>
+              <a:rPr lang="en-US" sz="550" b="1" dirty="0">
+                <a:solidFill>
+                  <a:srgbClr val="00897B"/>
+                </a:solidFill>
+                <a:latin typeface="Calibri" pitchFamily="34" charset="0"/>
+                <a:ea typeface="Calibri" pitchFamily="34" charset="-122"/>
+                <a:cs typeface="Calibri" pitchFamily="34" charset="-120"/>
+              </a:rPr>
+              <a:t>Functional</a:t>
+            </a:r>
+            <a:endParaRPr lang="en-US" sz="550" dirty="0"/>
+          </a:p>
+        </p:txBody>
+      </p:sp>
+      <p:sp>
+        <p:nvSpPr>
+          <p:cNvPr id="36" name="Shape 34"/>
+          <p:cNvSpPr/>
+          <p:nvPr/>
+        </p:nvSpPr>
+        <p:spPr>
+          <a:xfrm>
+            <a:off x="5870448" y="1883664"/>
+            <a:ext cx="0" cy="91440"/>
+          </a:xfrm>
+          <a:prstGeom prst="line">
+            <a:avLst/>
+          </a:prstGeom>
+          <a:noFill/>
+          <a:ln w="6350">
+            <a:solidFill>
+              <a:srgbClr val="E8E8E8"/>
+            </a:solidFill>
+            <a:prstDash val="dot"/>
+          </a:ln>
+        </p:spPr>
+        <p:txBody>
+          <a:bodyPr/>
+          <a:lstStyle/>
+          <a:p>
+            <a:endParaRPr lang="en-US"/>
+          </a:p>
+        </p:txBody>
+      </p:sp>
+      <p:sp>
+        <p:nvSpPr>
+          <p:cNvPr id="37" name="Text 35"/>
+          <p:cNvSpPr/>
+          <p:nvPr/>
+        </p:nvSpPr>
+        <p:spPr>
+          <a:xfrm>
+            <a:off x="5248656" y="1975104"/>
+            <a:ext cx="256032" cy="128016"/>
+          </a:xfrm>
+          <a:prstGeom prst="rect">
+            <a:avLst/>
+          </a:prstGeom>
+          <a:noFill/>
+          <a:ln/>
+        </p:spPr>
+        <p:txBody>
+          <a:bodyPr wrap="square" lIns="0" tIns="0" rIns="0" bIns="0" rtlCol="0" anchor="ctr"/>
+          <a:lstStyle/>
+          <a:p>
+            <a:pPr marL="0" indent="0">
+              <a:buNone/>
+            </a:pPr>
+            <a:r>
+              <a:rPr lang="en-US" sz="500" b="1" dirty="0">
+                <a:solidFill>
+                  <a:srgbClr val="78909C"/>
+                </a:solidFill>
+                <a:latin typeface="Calibri" pitchFamily="34" charset="0"/>
+                <a:ea typeface="Calibri" pitchFamily="34" charset="-122"/>
+                <a:cs typeface="Calibri" pitchFamily="34" charset="-120"/>
+              </a:rPr>
+              <a:t>MCP</a:t>
+            </a:r>
+            <a:endParaRPr lang="en-US" sz="500" dirty="0"/>
+          </a:p>
+        </p:txBody>
+      </p:sp>
+      <p:sp>
+        <p:nvSpPr>
+          <p:cNvPr id="38" name="Shape 36"/>
+          <p:cNvSpPr/>
+          <p:nvPr/>
+        </p:nvSpPr>
+        <p:spPr>
+          <a:xfrm>
+            <a:off x="5504688" y="1975104"/>
+            <a:ext cx="256032" cy="128016"/>
+          </a:xfrm>
+          <a:prstGeom prst="roundRect">
+            <a:avLst>
+              <a:gd name="adj" fmla="val 14286"/>
+            </a:avLst>
+          </a:prstGeom>
+          <a:solidFill>
+            <a:srgbClr val="FAFAFA"/>
+          </a:solidFill>
+          <a:ln w="5080">
+            <a:solidFill>
+              <a:srgbClr val="E8E8E8"/>
+            </a:solidFill>
+            <a:prstDash val="solid"/>
+          </a:ln>
+        </p:spPr>
+        <p:txBody>
+          <a:bodyPr/>
+          <a:lstStyle/>
+          <a:p>
+            <a:endParaRPr lang="en-US"/>
+          </a:p>
+        </p:txBody>
+      </p:sp>
+      <p:sp>
+        <p:nvSpPr>
+          <p:cNvPr id="39" name="Text 37"/>
+          <p:cNvSpPr/>
+          <p:nvPr/>
+        </p:nvSpPr>
+        <p:spPr>
+          <a:xfrm>
+            <a:off x="5504688" y="1975104"/>
+            <a:ext cx="256032" cy="128016"/>
+          </a:xfrm>
+          <a:prstGeom prst="rect">
+            <a:avLst/>
+          </a:prstGeom>
+          <a:noFill/>
+          <a:ln/>
+        </p:spPr>
+        <p:txBody>
+          <a:bodyPr wrap="square" lIns="0" tIns="0" rIns="0" bIns="0" rtlCol="0" anchor="ctr"/>
+          <a:lstStyle/>
+          <a:p>
+            <a:pPr marL="0" indent="0" algn="ctr">
+              <a:buNone/>
+            </a:pPr>
+            <a:r>
+              <a:rPr lang="en-US" sz="550" b="1" dirty="0">
+                <a:solidFill>
+                  <a:srgbClr val="00897B"/>
+                </a:solidFill>
+                <a:latin typeface="Calibri" pitchFamily="34" charset="0"/>
+                <a:ea typeface="Calibri" pitchFamily="34" charset="-122"/>
+                <a:cs typeface="Calibri" pitchFamily="34" charset="-120"/>
+              </a:rPr>
+              <a:t>DEV</a:t>
+            </a:r>
+            <a:endParaRPr lang="en-US" sz="550" dirty="0"/>
+          </a:p>
+        </p:txBody>
+      </p:sp>
+      <p:sp>
+        <p:nvSpPr>
+          <p:cNvPr id="40" name="Shape 38"/>
+          <p:cNvSpPr/>
+          <p:nvPr/>
+        </p:nvSpPr>
+        <p:spPr>
+          <a:xfrm>
+            <a:off x="5769864" y="2039112"/>
+            <a:ext cx="91440" cy="0"/>
+          </a:xfrm>
+          <a:prstGeom prst="line">
+            <a:avLst/>
+          </a:prstGeom>
+          <a:noFill/>
+          <a:ln w="7620">
+            <a:solidFill>
+              <a:srgbClr val="BDBDBD"/>
+            </a:solidFill>
+            <a:prstDash val="solid"/>
+            <a:tailEnd type="triangle"/>
+          </a:ln>
+        </p:spPr>
+        <p:txBody>
+          <a:bodyPr/>
+          <a:lstStyle/>
+          <a:p>
+            <a:endParaRPr lang="en-US"/>
+          </a:p>
+        </p:txBody>
+      </p:sp>
+      <p:sp>
+        <p:nvSpPr>
+          <p:cNvPr id="41" name="Shape 39"/>
+          <p:cNvSpPr/>
+          <p:nvPr/>
+        </p:nvSpPr>
+        <p:spPr>
+          <a:xfrm>
+            <a:off x="5870448" y="1975104"/>
+            <a:ext cx="256032" cy="128016"/>
+          </a:xfrm>
+          <a:prstGeom prst="roundRect">
+            <a:avLst>
+              <a:gd name="adj" fmla="val 14286"/>
+            </a:avLst>
+          </a:prstGeom>
+          <a:solidFill>
+            <a:srgbClr val="FAFAFA"/>
+          </a:solidFill>
+          <a:ln w="5080">
+            <a:solidFill>
+              <a:srgbClr val="E8E8E8"/>
+            </a:solidFill>
+            <a:prstDash val="solid"/>
+          </a:ln>
+        </p:spPr>
+        <p:txBody>
+          <a:bodyPr/>
+          <a:lstStyle/>
+          <a:p>
+            <a:endParaRPr lang="en-US"/>
+          </a:p>
+        </p:txBody>
+      </p:sp>
+      <p:sp>
+        <p:nvSpPr>
+          <p:cNvPr id="42" name="Text 40"/>
+          <p:cNvSpPr/>
+          <p:nvPr/>
+        </p:nvSpPr>
+        <p:spPr>
+          <a:xfrm>
+            <a:off x="5870448" y="1975104"/>
+            <a:ext cx="256032" cy="128016"/>
+          </a:xfrm>
+          <a:prstGeom prst="rect">
+            <a:avLst/>
+          </a:prstGeom>
+          <a:noFill/>
+          <a:ln/>
+        </p:spPr>
+        <p:txBody>
+          <a:bodyPr wrap="square" lIns="0" tIns="0" rIns="0" bIns="0" rtlCol="0" anchor="ctr"/>
+          <a:lstStyle/>
+          <a:p>
+            <a:pPr marL="0" indent="0" algn="ctr">
+              <a:buNone/>
+            </a:pPr>
+            <a:r>
+              <a:rPr lang="en-US" sz="550" b="1" dirty="0">
+                <a:solidFill>
+                  <a:srgbClr val="00897B"/>
+                </a:solidFill>
+                <a:latin typeface="Calibri" pitchFamily="34" charset="0"/>
+                <a:ea typeface="Calibri" pitchFamily="34" charset="-122"/>
+                <a:cs typeface="Calibri" pitchFamily="34" charset="-120"/>
+              </a:rPr>
+              <a:t>UAT</a:t>
+            </a:r>
+            <a:endParaRPr lang="en-US" sz="550" dirty="0"/>
+          </a:p>
+        </p:txBody>
+      </p:sp>
+      <p:sp>
+        <p:nvSpPr>
+          <p:cNvPr id="43" name="Shape 41"/>
+          <p:cNvSpPr/>
+          <p:nvPr/>
+        </p:nvSpPr>
+        <p:spPr>
+          <a:xfrm>
+            <a:off x="6135624" y="2039112"/>
+            <a:ext cx="91440" cy="0"/>
+          </a:xfrm>
+          <a:prstGeom prst="line">
+            <a:avLst/>
+          </a:prstGeom>
+          <a:noFill/>
+          <a:ln w="7620">
+            <a:solidFill>
+              <a:srgbClr val="BDBDBD"/>
+            </a:solidFill>
+            <a:prstDash val="solid"/>
+            <a:tailEnd type="triangle"/>
+          </a:ln>
+        </p:spPr>
+        <p:txBody>
+          <a:bodyPr/>
+          <a:lstStyle/>
+          <a:p>
+            <a:endParaRPr lang="en-US"/>
+          </a:p>
+        </p:txBody>
+      </p:sp>
+      <p:sp>
+        <p:nvSpPr>
+          <p:cNvPr id="44" name="Shape 42"/>
+          <p:cNvSpPr/>
+          <p:nvPr/>
+        </p:nvSpPr>
+        <p:spPr>
+          <a:xfrm>
+            <a:off x="6236208" y="1975104"/>
+            <a:ext cx="256032" cy="128016"/>
+          </a:xfrm>
+          <a:prstGeom prst="roundRect">
+            <a:avLst>
+              <a:gd name="adj" fmla="val 14286"/>
+            </a:avLst>
+          </a:prstGeom>
+          <a:solidFill>
+            <a:srgbClr val="FAFAFA"/>
+          </a:solidFill>
+          <a:ln w="5080">
+            <a:solidFill>
+              <a:srgbClr val="E8E8E8"/>
+            </a:solidFill>
+            <a:prstDash val="solid"/>
+          </a:ln>
+        </p:spPr>
+        <p:txBody>
+          <a:bodyPr/>
+          <a:lstStyle/>
+          <a:p>
+            <a:endParaRPr lang="en-US"/>
+          </a:p>
+        </p:txBody>
+      </p:sp>
+      <p:sp>
+        <p:nvSpPr>
+          <p:cNvPr id="45" name="Text 43"/>
+          <p:cNvSpPr/>
+          <p:nvPr/>
+        </p:nvSpPr>
+        <p:spPr>
+          <a:xfrm>
+            <a:off x="6236208" y="1975104"/>
+            <a:ext cx="256032" cy="128016"/>
+          </a:xfrm>
+          <a:prstGeom prst="rect">
+            <a:avLst/>
+          </a:prstGeom>
+          <a:noFill/>
+          <a:ln/>
+        </p:spPr>
+        <p:txBody>
+          <a:bodyPr wrap="square" lIns="0" tIns="0" rIns="0" bIns="0" rtlCol="0" anchor="ctr"/>
+          <a:lstStyle/>
+          <a:p>
+            <a:pPr marL="0" indent="0" algn="ctr">
+              <a:buNone/>
+            </a:pPr>
+            <a:r>
+              <a:rPr lang="en-US" sz="550" b="1" dirty="0">
+                <a:solidFill>
+                  <a:srgbClr val="00897B"/>
+                </a:solidFill>
+                <a:latin typeface="Calibri" pitchFamily="34" charset="0"/>
+                <a:ea typeface="Calibri" pitchFamily="34" charset="-122"/>
+                <a:cs typeface="Calibri" pitchFamily="34" charset="-120"/>
+              </a:rPr>
+              <a:t>PROD</a:t>
+            </a:r>
+            <a:endParaRPr lang="en-US" sz="550" dirty="0"/>
+          </a:p>
+        </p:txBody>
+      </p:sp>
+      <p:sp>
+        <p:nvSpPr>
+          <p:cNvPr id="46" name="Text 44"/>
+          <p:cNvSpPr/>
+          <p:nvPr/>
+        </p:nvSpPr>
+        <p:spPr>
+          <a:xfrm>
+            <a:off x="5248656" y="2157984"/>
+            <a:ext cx="256032" cy="128016"/>
+          </a:xfrm>
+          <a:prstGeom prst="rect">
+            <a:avLst/>
+          </a:prstGeom>
+          <a:noFill/>
+          <a:ln/>
+        </p:spPr>
+        <p:txBody>
+          <a:bodyPr wrap="square" lIns="0" tIns="0" rIns="0" bIns="0" rtlCol="0" anchor="ctr"/>
+          <a:lstStyle/>
+          <a:p>
+            <a:pPr marL="0" indent="0">
+              <a:buNone/>
+            </a:pPr>
+            <a:r>
+              <a:rPr lang="en-US" sz="500" b="1" dirty="0">
+                <a:solidFill>
+                  <a:srgbClr val="78909C"/>
+                </a:solidFill>
+                <a:latin typeface="Calibri" pitchFamily="34" charset="0"/>
+                <a:ea typeface="Calibri" pitchFamily="34" charset="-122"/>
+                <a:cs typeface="Calibri" pitchFamily="34" charset="-120"/>
+              </a:rPr>
+              <a:t>DOC</a:t>
+            </a:r>
+            <a:endParaRPr lang="en-US" sz="500" dirty="0"/>
+          </a:p>
+        </p:txBody>
+      </p:sp>
+      <p:sp>
+        <p:nvSpPr>
+          <p:cNvPr id="47" name="Shape 45"/>
+          <p:cNvSpPr/>
+          <p:nvPr/>
+        </p:nvSpPr>
+        <p:spPr>
+          <a:xfrm>
+            <a:off x="5504688" y="2157984"/>
+            <a:ext cx="256032" cy="128016"/>
+          </a:xfrm>
+          <a:prstGeom prst="roundRect">
+            <a:avLst>
+              <a:gd name="adj" fmla="val 14286"/>
+            </a:avLst>
+          </a:prstGeom>
+          <a:solidFill>
+            <a:srgbClr val="FAFAFA"/>
+          </a:solidFill>
+          <a:ln w="5080">
+            <a:solidFill>
+              <a:srgbClr val="E8E8E8"/>
+            </a:solidFill>
+            <a:prstDash val="solid"/>
+          </a:ln>
+        </p:spPr>
+        <p:txBody>
+          <a:bodyPr/>
+          <a:lstStyle/>
+          <a:p>
+            <a:endParaRPr lang="en-US"/>
+          </a:p>
+        </p:txBody>
+      </p:sp>
+      <p:sp>
+        <p:nvSpPr>
+          <p:cNvPr id="48" name="Text 46"/>
+          <p:cNvSpPr/>
+          <p:nvPr/>
+        </p:nvSpPr>
+        <p:spPr>
+          <a:xfrm>
+            <a:off x="5504688" y="2157984"/>
+            <a:ext cx="256032" cy="128016"/>
+          </a:xfrm>
+          <a:prstGeom prst="rect">
+            <a:avLst/>
+          </a:prstGeom>
+          <a:noFill/>
+          <a:ln/>
+        </p:spPr>
+        <p:txBody>
+          <a:bodyPr wrap="square" lIns="0" tIns="0" rIns="0" bIns="0" rtlCol="0" anchor="ctr"/>
+          <a:lstStyle/>
+          <a:p>
+            <a:pPr marL="0" indent="0" algn="ctr">
+              <a:buNone/>
+            </a:pPr>
+            <a:r>
+              <a:rPr lang="en-US" sz="550" b="1" dirty="0">
+                <a:solidFill>
+                  <a:srgbClr val="546E7A"/>
+                </a:solidFill>
+                <a:latin typeface="Calibri" pitchFamily="34" charset="0"/>
+                <a:ea typeface="Calibri" pitchFamily="34" charset="-122"/>
+                <a:cs typeface="Calibri" pitchFamily="34" charset="-120"/>
+              </a:rPr>
+              <a:t>Ingest</a:t>
+            </a:r>
+            <a:endParaRPr lang="en-US" sz="550" dirty="0"/>
+          </a:p>
+        </p:txBody>
+      </p:sp>
+      <p:sp>
+        <p:nvSpPr>
+          <p:cNvPr id="49" name="Shape 47"/>
+          <p:cNvSpPr/>
+          <p:nvPr/>
+        </p:nvSpPr>
+        <p:spPr>
+          <a:xfrm>
+            <a:off x="5769864" y="2221992"/>
+            <a:ext cx="91440" cy="0"/>
+          </a:xfrm>
+          <a:prstGeom prst="line">
+            <a:avLst/>
+          </a:prstGeom>
+          <a:noFill/>
+          <a:ln w="7620">
+            <a:solidFill>
+              <a:srgbClr val="BDBDBD"/>
+            </a:solidFill>
+            <a:prstDash val="solid"/>
+            <a:tailEnd type="triangle"/>
+          </a:ln>
+        </p:spPr>
+        <p:txBody>
+          <a:bodyPr/>
+          <a:lstStyle/>
+          <a:p>
+            <a:endParaRPr lang="en-US"/>
+          </a:p>
+        </p:txBody>
+      </p:sp>
+      <p:sp>
+        <p:nvSpPr>
+          <p:cNvPr id="50" name="Shape 48"/>
+          <p:cNvSpPr/>
+          <p:nvPr/>
+        </p:nvSpPr>
+        <p:spPr>
+          <a:xfrm>
+            <a:off x="5870448" y="2157984"/>
+            <a:ext cx="256032" cy="128016"/>
+          </a:xfrm>
+          <a:prstGeom prst="roundRect">
+            <a:avLst>
+              <a:gd name="adj" fmla="val 14286"/>
+            </a:avLst>
+          </a:prstGeom>
+          <a:solidFill>
+            <a:srgbClr val="FAFAFA"/>
+          </a:solidFill>
+          <a:ln w="5080">
+            <a:solidFill>
+              <a:srgbClr val="E8E8E8"/>
+            </a:solidFill>
+            <a:prstDash val="solid"/>
+          </a:ln>
+        </p:spPr>
+        <p:txBody>
+          <a:bodyPr/>
+          <a:lstStyle/>
+          <a:p>
+            <a:endParaRPr lang="en-US"/>
+          </a:p>
+        </p:txBody>
+      </p:sp>
+      <p:sp>
+        <p:nvSpPr>
+          <p:cNvPr id="51" name="Text 49"/>
+          <p:cNvSpPr/>
+          <p:nvPr/>
+        </p:nvSpPr>
+        <p:spPr>
+          <a:xfrm>
+            <a:off x="5870448" y="2157984"/>
+            <a:ext cx="256032" cy="128016"/>
+          </a:xfrm>
+          <a:prstGeom prst="rect">
+            <a:avLst/>
+          </a:prstGeom>
+          <a:noFill/>
+          <a:ln/>
+        </p:spPr>
+        <p:txBody>
+          <a:bodyPr wrap="square" lIns="0" tIns="0" rIns="0" bIns="0" rtlCol="0" anchor="ctr"/>
+          <a:lstStyle/>
+          <a:p>
+            <a:pPr marL="0" indent="0" algn="ctr">
+              <a:buNone/>
+            </a:pPr>
+            <a:r>
+              <a:rPr lang="en-US" sz="550" b="1" dirty="0">
+                <a:solidFill>
+                  <a:srgbClr val="546E7A"/>
+                </a:solidFill>
+                <a:latin typeface="Calibri" pitchFamily="34" charset="0"/>
+                <a:ea typeface="Calibri" pitchFamily="34" charset="-122"/>
+                <a:cs typeface="Calibri" pitchFamily="34" charset="-120"/>
+              </a:rPr>
+              <a:t>Review</a:t>
+            </a:r>
+            <a:endParaRPr lang="en-US" sz="550" dirty="0"/>
+          </a:p>
+        </p:txBody>
+      </p:sp>
+      <p:sp>
+        <p:nvSpPr>
+          <p:cNvPr id="52" name="Shape 50"/>
+          <p:cNvSpPr/>
+          <p:nvPr/>
+        </p:nvSpPr>
+        <p:spPr>
+          <a:xfrm>
+            <a:off x="6135624" y="2221992"/>
+            <a:ext cx="91440" cy="0"/>
+          </a:xfrm>
+          <a:prstGeom prst="line">
+            <a:avLst/>
+          </a:prstGeom>
+          <a:noFill/>
+          <a:ln w="7620">
+            <a:solidFill>
+              <a:srgbClr val="BDBDBD"/>
+            </a:solidFill>
+            <a:prstDash val="solid"/>
+            <a:tailEnd type="triangle"/>
+          </a:ln>
+        </p:spPr>
+        <p:txBody>
+          <a:bodyPr/>
+          <a:lstStyle/>
+          <a:p>
+            <a:endParaRPr lang="en-US"/>
+          </a:p>
+        </p:txBody>
+      </p:sp>
+      <p:sp>
+        <p:nvSpPr>
+          <p:cNvPr id="53" name="Shape 51"/>
+          <p:cNvSpPr/>
+          <p:nvPr/>
+        </p:nvSpPr>
+        <p:spPr>
+          <a:xfrm>
+            <a:off x="6236208" y="2157984"/>
+            <a:ext cx="256032" cy="128016"/>
+          </a:xfrm>
+          <a:prstGeom prst="roundRect">
+            <a:avLst>
+              <a:gd name="adj" fmla="val 14286"/>
+            </a:avLst>
+          </a:prstGeom>
+          <a:solidFill>
+            <a:srgbClr val="FAFAFA"/>
+          </a:solidFill>
+          <a:ln w="5080">
+            <a:solidFill>
+              <a:srgbClr val="E8E8E8"/>
+            </a:solidFill>
+            <a:prstDash val="solid"/>
+          </a:ln>
+        </p:spPr>
+        <p:txBody>
+          <a:bodyPr/>
+          <a:lstStyle/>
+          <a:p>
+            <a:endParaRPr lang="en-US"/>
+          </a:p>
+        </p:txBody>
+      </p:sp>
+      <p:sp>
+        <p:nvSpPr>
+          <p:cNvPr id="54" name="Text 52"/>
+          <p:cNvSpPr/>
+          <p:nvPr/>
+        </p:nvSpPr>
+        <p:spPr>
+          <a:xfrm>
+            <a:off x="6236208" y="2157984"/>
+            <a:ext cx="256032" cy="128016"/>
+          </a:xfrm>
+          <a:prstGeom prst="rect">
+            <a:avLst/>
+          </a:prstGeom>
+          <a:noFill/>
+          <a:ln/>
+        </p:spPr>
+        <p:txBody>
+          <a:bodyPr wrap="square" lIns="0" tIns="0" rIns="0" bIns="0" rtlCol="0" anchor="ctr"/>
+          <a:lstStyle/>
+          <a:p>
+            <a:pPr marL="0" indent="0" algn="ctr">
+              <a:buNone/>
+            </a:pPr>
+            <a:r>
+              <a:rPr lang="en-US" sz="550" b="1" dirty="0">
+                <a:solidFill>
+                  <a:srgbClr val="546E7A"/>
+                </a:solidFill>
+                <a:latin typeface="Calibri" pitchFamily="34" charset="0"/>
+                <a:ea typeface="Calibri" pitchFamily="34" charset="-122"/>
+                <a:cs typeface="Calibri" pitchFamily="34" charset="-120"/>
+              </a:rPr>
+              <a:t>Improve</a:t>
+            </a:r>
+            <a:endParaRPr lang="en-US" sz="550" dirty="0"/>
+          </a:p>
+        </p:txBody>
+      </p:sp>
+      <p:sp>
+        <p:nvSpPr>
+          <p:cNvPr id="55" name="Shape 53"/>
+          <p:cNvSpPr/>
+          <p:nvPr/>
+        </p:nvSpPr>
+        <p:spPr>
+          <a:xfrm>
+            <a:off x="2450592" y="1371600"/>
+            <a:ext cx="0" cy="0"/>
+          </a:xfrm>
+          <a:prstGeom prst="line">
+            <a:avLst/>
+          </a:prstGeom>
+          <a:noFill/>
+          <a:ln w="10160">
+            <a:solidFill>
+              <a:srgbClr val="EF5350"/>
+            </a:solidFill>
+            <a:prstDash val="dash"/>
+          </a:ln>
+        </p:spPr>
+        <p:txBody>
+          <a:bodyPr/>
+          <a:lstStyle/>
+          <a:p>
+            <a:endParaRPr lang="en-US"/>
+          </a:p>
+        </p:txBody>
+      </p:sp>
+      <p:sp>
+        <p:nvSpPr>
+          <p:cNvPr id="56" name="Shape 54"/>
+          <p:cNvSpPr/>
+          <p:nvPr/>
+        </p:nvSpPr>
+        <p:spPr>
+          <a:xfrm>
+            <a:off x="1261872" y="1207008"/>
+            <a:ext cx="1188720" cy="0"/>
+          </a:xfrm>
+          <a:prstGeom prst="line">
+            <a:avLst/>
+          </a:prstGeom>
+          <a:noFill/>
+          <a:ln w="10160">
+            <a:solidFill>
+              <a:srgbClr val="EF5350"/>
+            </a:solidFill>
+            <a:prstDash val="dash"/>
+          </a:ln>
+        </p:spPr>
+        <p:txBody>
+          <a:bodyPr/>
+          <a:lstStyle/>
+          <a:p>
+            <a:endParaRPr lang="en-US"/>
+          </a:p>
+        </p:txBody>
+      </p:sp>
+      <p:sp>
+        <p:nvSpPr>
+          <p:cNvPr id="57" name="Shape 55"/>
+          <p:cNvSpPr/>
+          <p:nvPr/>
+        </p:nvSpPr>
+        <p:spPr>
+          <a:xfrm>
+            <a:off x="1261872" y="1207008"/>
+            <a:ext cx="0" cy="164592"/>
+          </a:xfrm>
+          <a:prstGeom prst="line">
+            <a:avLst/>
+          </a:prstGeom>
+          <a:noFill/>
+          <a:ln w="10160">
+            <a:solidFill>
+              <a:srgbClr val="EF5350"/>
+            </a:solidFill>
+            <a:prstDash val="dash"/>
+            <a:tailEnd type="triangle"/>
+          </a:ln>
+        </p:spPr>
+        <p:txBody>
+          <a:bodyPr/>
+          <a:lstStyle/>
+          <a:p>
+            <a:endParaRPr lang="en-US"/>
+          </a:p>
+        </p:txBody>
+      </p:sp>
+      <p:sp>
+        <p:nvSpPr>
+          <p:cNvPr id="58" name="Text 56"/>
+          <p:cNvSpPr/>
+          <p:nvPr/>
+        </p:nvSpPr>
+        <p:spPr>
+          <a:xfrm>
+            <a:off x="1298448" y="1088136"/>
+            <a:ext cx="731520" cy="118872"/>
+          </a:xfrm>
+          <a:prstGeom prst="rect">
+            <a:avLst/>
+          </a:prstGeom>
+          <a:noFill/>
+          <a:ln/>
+        </p:spPr>
+        <p:txBody>
+          <a:bodyPr wrap="square" lIns="0" tIns="0" rIns="0" bIns="0" rtlCol="0" anchor="ctr"/>
+          <a:lstStyle/>
+          <a:p>
+            <a:pPr marL="0" indent="0">
+              <a:buNone/>
+            </a:pPr>
+            <a:r>
+              <a:rPr lang="en-US" sz="550" i="1" dirty="0">
+                <a:solidFill>
+                  <a:srgbClr val="EF5350"/>
+                </a:solidFill>
+                <a:latin typeface="Calibri" pitchFamily="34" charset="0"/>
+                <a:ea typeface="Calibri" pitchFamily="34" charset="-122"/>
+                <a:cs typeface="Calibri" pitchFamily="34" charset="-120"/>
+              </a:rPr>
+              <a:t>Rejected</a:t>
+            </a:r>
+            <a:endParaRPr lang="en-US" sz="550" dirty="0"/>
+          </a:p>
+        </p:txBody>
+      </p:sp>
+      <p:sp>
+        <p:nvSpPr>
+          <p:cNvPr id="59" name="Shape 57"/>
+          <p:cNvSpPr/>
+          <p:nvPr/>
+        </p:nvSpPr>
+        <p:spPr>
+          <a:xfrm>
+            <a:off x="7655357" y="1371600"/>
+            <a:ext cx="0" cy="0"/>
+          </a:xfrm>
+          <a:prstGeom prst="line">
+            <a:avLst/>
+          </a:prstGeom>
+          <a:noFill/>
+          <a:ln w="10160">
+            <a:solidFill>
+              <a:srgbClr val="F57F17"/>
+            </a:solidFill>
+            <a:prstDash val="dash"/>
+          </a:ln>
+        </p:spPr>
+        <p:txBody>
+          <a:bodyPr/>
+          <a:lstStyle/>
+          <a:p>
+            <a:endParaRPr lang="en-US"/>
+          </a:p>
+        </p:txBody>
+      </p:sp>
+      <p:sp>
+        <p:nvSpPr>
+          <p:cNvPr id="60" name="Shape 58"/>
+          <p:cNvSpPr/>
+          <p:nvPr/>
+        </p:nvSpPr>
+        <p:spPr>
+          <a:xfrm>
+            <a:off x="3046781" y="1060704"/>
+            <a:ext cx="4608576" cy="0"/>
+          </a:xfrm>
+          <a:prstGeom prst="line">
+            <a:avLst/>
+          </a:prstGeom>
+          <a:noFill/>
+          <a:ln w="10160">
+            <a:solidFill>
+              <a:srgbClr val="F57F17"/>
+            </a:solidFill>
+            <a:prstDash val="dash"/>
+          </a:ln>
+        </p:spPr>
+        <p:txBody>
+          <a:bodyPr/>
+          <a:lstStyle/>
+          <a:p>
+            <a:endParaRPr lang="en-US"/>
+          </a:p>
+        </p:txBody>
+      </p:sp>
+      <p:sp>
+        <p:nvSpPr>
+          <p:cNvPr id="61" name="Shape 59"/>
+          <p:cNvSpPr/>
+          <p:nvPr/>
+        </p:nvSpPr>
+        <p:spPr>
+          <a:xfrm>
+            <a:off x="3046781" y="1060704"/>
+            <a:ext cx="0" cy="310896"/>
+          </a:xfrm>
+          <a:prstGeom prst="line">
+            <a:avLst/>
+          </a:prstGeom>
+          <a:noFill/>
+          <a:ln w="10160">
+            <a:solidFill>
+              <a:srgbClr val="F57F17"/>
+            </a:solidFill>
+            <a:prstDash val="dash"/>
+            <a:tailEnd type="triangle"/>
+          </a:ln>
+        </p:spPr>
+        <p:txBody>
+          <a:bodyPr/>
+          <a:lstStyle/>
+          <a:p>
+            <a:endParaRPr lang="en-US"/>
+          </a:p>
+        </p:txBody>
+      </p:sp>
+      <p:sp>
+        <p:nvSpPr>
+          <p:cNvPr id="62" name="Text 60"/>
+          <p:cNvSpPr/>
+          <p:nvPr/>
+        </p:nvSpPr>
+        <p:spPr>
+          <a:xfrm>
+            <a:off x="4939589" y="932688"/>
+            <a:ext cx="822960" cy="118872"/>
+          </a:xfrm>
+          <a:prstGeom prst="rect">
+            <a:avLst/>
+          </a:prstGeom>
+          <a:noFill/>
+          <a:ln/>
+        </p:spPr>
+        <p:txBody>
+          <a:bodyPr wrap="square" lIns="0" tIns="0" rIns="0" bIns="0" rtlCol="0" anchor="ctr"/>
+          <a:lstStyle/>
+          <a:p>
+            <a:pPr marL="0" indent="0" algn="ctr">
+              <a:buNone/>
+            </a:pPr>
+            <a:r>
+              <a:rPr lang="en-US" sz="550" i="1" dirty="0">
+                <a:solidFill>
+                  <a:srgbClr val="F57F17"/>
+                </a:solidFill>
+                <a:latin typeface="Calibri" pitchFamily="34" charset="0"/>
+                <a:ea typeface="Calibri" pitchFamily="34" charset="-122"/>
+                <a:cs typeface="Calibri" pitchFamily="34" charset="-120"/>
+              </a:rPr>
+              <a:t>Deprecated</a:t>
+            </a:r>
+            <a:endParaRPr lang="en-US" sz="550" dirty="0"/>
+          </a:p>
+        </p:txBody>
+      </p:sp>
+      <p:sp>
+        <p:nvSpPr>
+          <p:cNvPr id="63" name="Shape 61"/>
+          <p:cNvSpPr/>
+          <p:nvPr/>
+        </p:nvSpPr>
+        <p:spPr>
+          <a:xfrm>
+            <a:off x="548640" y="2468880"/>
+            <a:ext cx="8046720" cy="0"/>
+          </a:xfrm>
+          <a:prstGeom prst="line">
+            <a:avLst/>
+          </a:prstGeom>
+          <a:noFill/>
+          <a:ln w="6350">
+            <a:solidFill>
+              <a:srgbClr val="E8E8E8"/>
+            </a:solidFill>
+            <a:prstDash val="solid"/>
+          </a:ln>
+        </p:spPr>
+        <p:txBody>
+          <a:bodyPr/>
+          <a:lstStyle/>
+          <a:p>
+            <a:endParaRPr lang="en-US"/>
+          </a:p>
+        </p:txBody>
+      </p:sp>
+      <p:sp>
+        <p:nvSpPr>
+          <p:cNvPr id="64" name="Text 62"/>
+          <p:cNvSpPr/>
+          <p:nvPr/>
+        </p:nvSpPr>
+        <p:spPr>
+          <a:xfrm>
+            <a:off x="548640" y="2596896"/>
+            <a:ext cx="3657600" cy="164592"/>
+          </a:xfrm>
+          <a:prstGeom prst="rect">
+            <a:avLst/>
+          </a:prstGeom>
+          <a:noFill/>
+          <a:ln/>
+        </p:spPr>
+        <p:txBody>
+          <a:bodyPr wrap="square" lIns="0" tIns="0" rIns="0" bIns="0" rtlCol="0" anchor="ctr"/>
+          <a:lstStyle/>
+          <a:p>
+            <a:pPr marL="0" indent="0">
+              <a:buNone/>
+            </a:pPr>
+            <a:r>
+              <a:rPr lang="en-US" sz="700" b="1" kern="0" spc="200" dirty="0">
+                <a:solidFill>
+                  <a:srgbClr val="D71E28"/>
+                </a:solidFill>
+                <a:latin typeface="Calibri" pitchFamily="34" charset="0"/>
+                <a:ea typeface="Calibri" pitchFamily="34" charset="-122"/>
+                <a:cs typeface="Calibri" pitchFamily="34" charset="-120"/>
+              </a:rPr>
+              <a:t>DEVELOPER  JOURNEY</a:t>
+            </a:r>
+            <a:endParaRPr lang="en-US" sz="700" dirty="0"/>
+          </a:p>
+        </p:txBody>
+      </p:sp>
+      <p:sp>
+        <p:nvSpPr>
+          <p:cNvPr id="65" name="Shape 63"/>
+          <p:cNvSpPr/>
+          <p:nvPr/>
+        </p:nvSpPr>
+        <p:spPr>
+          <a:xfrm>
+            <a:off x="640080" y="2852928"/>
+            <a:ext cx="1243584" cy="512064"/>
+          </a:xfrm>
+          <a:prstGeom prst="rect">
+            <a:avLst/>
+          </a:prstGeom>
+          <a:solidFill>
+            <a:srgbClr val="F5F5F5"/>
+          </a:solidFill>
+          <a:ln w="6350">
+            <a:solidFill>
+              <a:srgbClr val="E8E8E8"/>
+            </a:solidFill>
+            <a:prstDash val="solid"/>
+          </a:ln>
+          <a:effectLst>
+            <a:outerShdw blurRad="38100" dist="12700" dir="8100000" algn="bl" rotWithShape="0">
+              <a:srgbClr val="000000">
+                <a:alpha val="6000"/>
+              </a:srgbClr>
+            </a:outerShdw>
+          </a:effectLst>
+        </p:spPr>
+        <p:txBody>
+          <a:bodyPr/>
+          <a:lstStyle/>
+          <a:p>
+            <a:endParaRPr lang="en-US"/>
+          </a:p>
+        </p:txBody>
+      </p:sp>
+      <p:sp>
+        <p:nvSpPr>
+          <p:cNvPr id="66" name="Shape 64"/>
+          <p:cNvSpPr/>
+          <p:nvPr/>
+        </p:nvSpPr>
+        <p:spPr>
+          <a:xfrm>
+            <a:off x="640080" y="2852928"/>
+            <a:ext cx="1243584" cy="27432"/>
+          </a:xfrm>
+          <a:prstGeom prst="rect">
+            <a:avLst/>
+          </a:prstGeom>
+          <a:solidFill>
+            <a:srgbClr val="D71E28"/>
+          </a:solidFill>
+          <a:ln/>
+        </p:spPr>
+        <p:txBody>
+          <a:bodyPr/>
+          <a:lstStyle/>
+          <a:p>
+            <a:endParaRPr lang="en-US"/>
+          </a:p>
+        </p:txBody>
+      </p:sp>
+      <p:sp>
+        <p:nvSpPr>
+          <p:cNvPr id="67" name="Text 65"/>
+          <p:cNvSpPr/>
+          <p:nvPr/>
+        </p:nvSpPr>
+        <p:spPr>
+          <a:xfrm>
+            <a:off x="694944" y="2907792"/>
+            <a:ext cx="1133856" cy="201168"/>
+          </a:xfrm>
+          <a:prstGeom prst="rect">
+            <a:avLst/>
+          </a:prstGeom>
+          <a:noFill/>
+          <a:ln/>
+        </p:spPr>
+        <p:txBody>
+          <a:bodyPr wrap="square" lIns="0" tIns="0" rIns="0" bIns="0" rtlCol="0" anchor="ctr"/>
+          <a:lstStyle/>
+          <a:p>
+            <a:pPr marL="0" indent="0">
+              <a:buNone/>
+            </a:pPr>
+            <a:r>
+              <a:rPr lang="en-US" sz="900" b="1" dirty="0">
+                <a:solidFill>
+                  <a:srgbClr val="263238"/>
+                </a:solidFill>
+                <a:latin typeface="Calibri" pitchFamily="34" charset="0"/>
+                <a:ea typeface="Calibri" pitchFamily="34" charset="-122"/>
+                <a:cs typeface="Calibri" pitchFamily="34" charset="-120"/>
+              </a:rPr>
+              <a:t>Authenticate</a:t>
+            </a:r>
+            <a:endParaRPr lang="en-US" sz="900" dirty="0"/>
+          </a:p>
+        </p:txBody>
+      </p:sp>
+      <p:sp>
+        <p:nvSpPr>
+          <p:cNvPr id="68" name="Text 66"/>
+          <p:cNvSpPr/>
+          <p:nvPr/>
+        </p:nvSpPr>
+        <p:spPr>
+          <a:xfrm>
+            <a:off x="694944" y="3108960"/>
+            <a:ext cx="1133856" cy="201168"/>
+          </a:xfrm>
+          <a:prstGeom prst="rect">
+            <a:avLst/>
+          </a:prstGeom>
+          <a:noFill/>
+          <a:ln/>
+        </p:spPr>
+        <p:txBody>
+          <a:bodyPr wrap="square" lIns="0" tIns="0" rIns="0" bIns="0" rtlCol="0" anchor="t"/>
+          <a:lstStyle/>
+          <a:p>
+            <a:pPr marL="0" indent="0">
+              <a:buNone/>
+            </a:pPr>
+            <a:r>
+              <a:rPr lang="en-US" sz="650" dirty="0">
+                <a:solidFill>
+                  <a:srgbClr val="78909C"/>
+                </a:solidFill>
+                <a:latin typeface="Calibri" pitchFamily="34" charset="0"/>
+                <a:ea typeface="Calibri" pitchFamily="34" charset="-122"/>
+                <a:cs typeface="Calibri" pitchFamily="34" charset="-120"/>
+              </a:rPr>
+              <a:t>SSO via IDP;</a:t>
+            </a:r>
+            <a:endParaRPr lang="en-US" sz="650" dirty="0"/>
+          </a:p>
+          <a:p>
+            <a:pPr marL="0" indent="0">
+              <a:buNone/>
+            </a:pPr>
+            <a:r>
+              <a:rPr lang="en-US" sz="650" dirty="0">
+                <a:solidFill>
+                  <a:srgbClr val="78909C"/>
+                </a:solidFill>
+                <a:latin typeface="Calibri" pitchFamily="34" charset="0"/>
+                <a:ea typeface="Calibri" pitchFamily="34" charset="-122"/>
+                <a:cs typeface="Calibri" pitchFamily="34" charset="-120"/>
+              </a:rPr>
+              <a:t>identity propagated to agent</a:t>
+            </a:r>
+            <a:endParaRPr lang="en-US" sz="650" dirty="0"/>
+          </a:p>
+        </p:txBody>
+      </p:sp>
+      <p:sp>
+        <p:nvSpPr>
+          <p:cNvPr id="69" name="Shape 67"/>
+          <p:cNvSpPr/>
+          <p:nvPr/>
+        </p:nvSpPr>
+        <p:spPr>
+          <a:xfrm>
+            <a:off x="2176272" y="2852928"/>
+            <a:ext cx="1243584" cy="512064"/>
+          </a:xfrm>
+          <a:prstGeom prst="rect">
+            <a:avLst/>
+          </a:prstGeom>
+          <a:solidFill>
+            <a:srgbClr val="F5F5F5"/>
+          </a:solidFill>
+          <a:ln w="6350">
+            <a:solidFill>
+              <a:srgbClr val="E8E8E8"/>
+            </a:solidFill>
+            <a:prstDash val="solid"/>
+          </a:ln>
+          <a:effectLst>
+            <a:outerShdw blurRad="38100" dist="12700" dir="8100000" algn="bl" rotWithShape="0">
+              <a:srgbClr val="000000">
+                <a:alpha val="6000"/>
+              </a:srgbClr>
+            </a:outerShdw>
+          </a:effectLst>
+        </p:spPr>
+        <p:txBody>
+          <a:bodyPr/>
+          <a:lstStyle/>
+          <a:p>
+            <a:endParaRPr lang="en-US"/>
+          </a:p>
+        </p:txBody>
+      </p:sp>
+      <p:sp>
+        <p:nvSpPr>
+          <p:cNvPr id="70" name="Shape 68"/>
+          <p:cNvSpPr/>
+          <p:nvPr/>
+        </p:nvSpPr>
+        <p:spPr>
+          <a:xfrm>
+            <a:off x="2176272" y="2852928"/>
+            <a:ext cx="1243584" cy="27432"/>
+          </a:xfrm>
+          <a:prstGeom prst="rect">
+            <a:avLst/>
+          </a:prstGeom>
+          <a:solidFill>
+            <a:srgbClr val="D71E28"/>
+          </a:solidFill>
+          <a:ln/>
+        </p:spPr>
+        <p:txBody>
+          <a:bodyPr/>
+          <a:lstStyle/>
+          <a:p>
+            <a:endParaRPr lang="en-US"/>
+          </a:p>
+        </p:txBody>
+      </p:sp>
+      <p:sp>
+        <p:nvSpPr>
+          <p:cNvPr id="71" name="Text 69"/>
+          <p:cNvSpPr/>
+          <p:nvPr/>
+        </p:nvSpPr>
+        <p:spPr>
+          <a:xfrm>
+            <a:off x="2231136" y="2907792"/>
+            <a:ext cx="1133856" cy="201168"/>
+          </a:xfrm>
+          <a:prstGeom prst="rect">
+            <a:avLst/>
+          </a:prstGeom>
+          <a:noFill/>
+          <a:ln/>
+        </p:spPr>
+        <p:txBody>
+          <a:bodyPr wrap="square" lIns="0" tIns="0" rIns="0" bIns="0" rtlCol="0" anchor="ctr"/>
+          <a:lstStyle/>
+          <a:p>
+            <a:pPr marL="0" indent="0">
+              <a:buNone/>
+            </a:pPr>
+            <a:r>
+              <a:rPr lang="en-US" sz="900" b="1" dirty="0">
+                <a:solidFill>
+                  <a:srgbClr val="263238"/>
+                </a:solidFill>
+                <a:latin typeface="Calibri" pitchFamily="34" charset="0"/>
+                <a:ea typeface="Calibri" pitchFamily="34" charset="-122"/>
+                <a:cs typeface="Calibri" pitchFamily="34" charset="-120"/>
+              </a:rPr>
+              <a:t>Query</a:t>
+            </a:r>
+            <a:endParaRPr lang="en-US" sz="900" dirty="0"/>
+          </a:p>
+        </p:txBody>
+      </p:sp>
+      <p:sp>
+        <p:nvSpPr>
+          <p:cNvPr id="72" name="Text 70"/>
+          <p:cNvSpPr/>
+          <p:nvPr/>
+        </p:nvSpPr>
+        <p:spPr>
+          <a:xfrm>
+            <a:off x="2231136" y="3108960"/>
+            <a:ext cx="1133856" cy="201168"/>
+          </a:xfrm>
+          <a:prstGeom prst="rect">
+            <a:avLst/>
+          </a:prstGeom>
+          <a:noFill/>
+          <a:ln/>
+        </p:spPr>
+        <p:txBody>
+          <a:bodyPr wrap="square" lIns="0" tIns="0" rIns="0" bIns="0" rtlCol="0" anchor="t"/>
+          <a:lstStyle/>
+          <a:p>
+            <a:pPr marL="0" indent="0">
+              <a:buNone/>
+            </a:pPr>
+            <a:r>
+              <a:rPr lang="en-US" sz="650" dirty="0">
+                <a:solidFill>
+                  <a:srgbClr val="78909C"/>
+                </a:solidFill>
+                <a:latin typeface="Calibri" pitchFamily="34" charset="0"/>
+                <a:ea typeface="Calibri" pitchFamily="34" charset="-122"/>
+                <a:cs typeface="Calibri" pitchFamily="34" charset="-120"/>
+              </a:rPr>
+              <a:t>Developer poses question</a:t>
+            </a:r>
+            <a:endParaRPr lang="en-US" sz="650" dirty="0"/>
+          </a:p>
+          <a:p>
+            <a:pPr marL="0" indent="0">
+              <a:buNone/>
+            </a:pPr>
+            <a:r>
+              <a:rPr lang="en-US" sz="650" dirty="0">
+                <a:solidFill>
+                  <a:srgbClr val="78909C"/>
+                </a:solidFill>
+                <a:latin typeface="Calibri" pitchFamily="34" charset="0"/>
+                <a:ea typeface="Calibri" pitchFamily="34" charset="-122"/>
+                <a:cs typeface="Calibri" pitchFamily="34" charset="-120"/>
+              </a:rPr>
+              <a:t>in natural language</a:t>
+            </a:r>
+            <a:endParaRPr lang="en-US" sz="650" dirty="0"/>
+          </a:p>
+        </p:txBody>
+      </p:sp>
+      <p:sp>
+        <p:nvSpPr>
+          <p:cNvPr id="73" name="Shape 71"/>
+          <p:cNvSpPr/>
+          <p:nvPr/>
+        </p:nvSpPr>
+        <p:spPr>
+          <a:xfrm>
+            <a:off x="3712464" y="2852928"/>
+            <a:ext cx="1243584" cy="512064"/>
+          </a:xfrm>
+          <a:prstGeom prst="rect">
+            <a:avLst/>
+          </a:prstGeom>
+          <a:solidFill>
+            <a:srgbClr val="F5F5F5"/>
+          </a:solidFill>
+          <a:ln w="6350">
+            <a:solidFill>
+              <a:srgbClr val="E8E8E8"/>
+            </a:solidFill>
+            <a:prstDash val="solid"/>
+          </a:ln>
+          <a:effectLst>
+            <a:outerShdw blurRad="38100" dist="12700" dir="8100000" algn="bl" rotWithShape="0">
+              <a:srgbClr val="000000">
+                <a:alpha val="6000"/>
+              </a:srgbClr>
+            </a:outerShdw>
+          </a:effectLst>
+        </p:spPr>
+        <p:txBody>
+          <a:bodyPr/>
+          <a:lstStyle/>
+          <a:p>
+            <a:endParaRPr lang="en-US"/>
+          </a:p>
+        </p:txBody>
+      </p:sp>
+      <p:sp>
+        <p:nvSpPr>
+          <p:cNvPr id="74" name="Shape 72"/>
+          <p:cNvSpPr/>
+          <p:nvPr/>
+        </p:nvSpPr>
+        <p:spPr>
+          <a:xfrm>
+            <a:off x="3712464" y="2852928"/>
+            <a:ext cx="1243584" cy="27432"/>
+          </a:xfrm>
+          <a:prstGeom prst="rect">
+            <a:avLst/>
+          </a:prstGeom>
+          <a:solidFill>
+            <a:srgbClr val="D71E28"/>
+          </a:solidFill>
+          <a:ln/>
+        </p:spPr>
+        <p:txBody>
+          <a:bodyPr/>
+          <a:lstStyle/>
+          <a:p>
+            <a:endParaRPr lang="en-US"/>
+          </a:p>
+        </p:txBody>
+      </p:sp>
+      <p:sp>
+        <p:nvSpPr>
+          <p:cNvPr id="75" name="Text 73"/>
+          <p:cNvSpPr/>
+          <p:nvPr/>
+        </p:nvSpPr>
+        <p:spPr>
+          <a:xfrm>
+            <a:off x="3767328" y="2907792"/>
+            <a:ext cx="1133856" cy="201168"/>
+          </a:xfrm>
+          <a:prstGeom prst="rect">
+            <a:avLst/>
+          </a:prstGeom>
+          <a:noFill/>
+          <a:ln/>
+        </p:spPr>
+        <p:txBody>
+          <a:bodyPr wrap="square" lIns="0" tIns="0" rIns="0" bIns="0" rtlCol="0" anchor="ctr"/>
+          <a:lstStyle/>
+          <a:p>
+            <a:pPr marL="0" indent="0">
+              <a:buNone/>
+            </a:pPr>
+            <a:r>
+              <a:rPr lang="en-US" sz="900" b="1" dirty="0">
+                <a:solidFill>
+                  <a:srgbClr val="263238"/>
+                </a:solidFill>
+                <a:latin typeface="Calibri" pitchFamily="34" charset="0"/>
+                <a:ea typeface="Calibri" pitchFamily="34" charset="-122"/>
+                <a:cs typeface="Calibri" pitchFamily="34" charset="-120"/>
+              </a:rPr>
+              <a:t>Orchestrate</a:t>
+            </a:r>
+            <a:endParaRPr lang="en-US" sz="900" dirty="0"/>
+          </a:p>
+        </p:txBody>
+      </p:sp>
+      <p:sp>
+        <p:nvSpPr>
+          <p:cNvPr id="76" name="Text 74"/>
+          <p:cNvSpPr/>
+          <p:nvPr/>
+        </p:nvSpPr>
+        <p:spPr>
+          <a:xfrm>
+            <a:off x="3767328" y="3108960"/>
+            <a:ext cx="1133856" cy="201168"/>
+          </a:xfrm>
+          <a:prstGeom prst="rect">
+            <a:avLst/>
+          </a:prstGeom>
+          <a:noFill/>
+          <a:ln/>
+        </p:spPr>
+        <p:txBody>
+          <a:bodyPr wrap="square" lIns="0" tIns="0" rIns="0" bIns="0" rtlCol="0" anchor="t"/>
+          <a:lstStyle/>
+          <a:p>
+            <a:pPr marL="0" indent="0">
+              <a:buNone/>
+            </a:pPr>
+            <a:r>
+              <a:rPr lang="en-US" sz="650" dirty="0">
+                <a:solidFill>
+                  <a:srgbClr val="78909C"/>
+                </a:solidFill>
+                <a:latin typeface="Calibri" pitchFamily="34" charset="0"/>
+                <a:ea typeface="Calibri" pitchFamily="34" charset="-122"/>
+                <a:cs typeface="Calibri" pitchFamily="34" charset="-120"/>
+              </a:rPr>
+              <a:t>Supervisor routes to</a:t>
+            </a:r>
+            <a:endParaRPr lang="en-US" sz="650" dirty="0"/>
+          </a:p>
+          <a:p>
+            <a:pPr marL="0" indent="0">
+              <a:buNone/>
+            </a:pPr>
+            <a:r>
+              <a:rPr lang="en-US" sz="650" dirty="0">
+                <a:solidFill>
+                  <a:srgbClr val="78909C"/>
+                </a:solidFill>
+                <a:latin typeface="Calibri" pitchFamily="34" charset="0"/>
+                <a:ea typeface="Calibri" pitchFamily="34" charset="-122"/>
+                <a:cs typeface="Calibri" pitchFamily="34" charset="-120"/>
+              </a:rPr>
+              <a:t>specialized sub-agent</a:t>
+            </a:r>
+            <a:endParaRPr lang="en-US" sz="650" dirty="0"/>
+          </a:p>
+        </p:txBody>
+      </p:sp>
+      <p:sp>
+        <p:nvSpPr>
+          <p:cNvPr id="77" name="Shape 75"/>
+          <p:cNvSpPr/>
+          <p:nvPr/>
+        </p:nvSpPr>
+        <p:spPr>
+          <a:xfrm>
+            <a:off x="5248656" y="2852928"/>
+            <a:ext cx="1243584" cy="512064"/>
+          </a:xfrm>
+          <a:prstGeom prst="rect">
+            <a:avLst/>
+          </a:prstGeom>
+          <a:solidFill>
+            <a:srgbClr val="F5F5F5"/>
+          </a:solidFill>
+          <a:ln w="6350">
+            <a:solidFill>
+              <a:srgbClr val="E8E8E8"/>
+            </a:solidFill>
+            <a:prstDash val="solid"/>
+          </a:ln>
+          <a:effectLst>
+            <a:outerShdw blurRad="38100" dist="12700" dir="8100000" algn="bl" rotWithShape="0">
+              <a:srgbClr val="000000">
+                <a:alpha val="6000"/>
+              </a:srgbClr>
+            </a:outerShdw>
+          </a:effectLst>
+        </p:spPr>
+        <p:txBody>
+          <a:bodyPr/>
+          <a:lstStyle/>
+          <a:p>
+            <a:endParaRPr lang="en-US"/>
+          </a:p>
+        </p:txBody>
+      </p:sp>
+      <p:sp>
+        <p:nvSpPr>
+          <p:cNvPr id="78" name="Shape 76"/>
+          <p:cNvSpPr/>
+          <p:nvPr/>
+        </p:nvSpPr>
+        <p:spPr>
+          <a:xfrm>
+            <a:off x="5248656" y="2852928"/>
+            <a:ext cx="1243584" cy="27432"/>
+          </a:xfrm>
+          <a:prstGeom prst="rect">
+            <a:avLst/>
+          </a:prstGeom>
+          <a:solidFill>
+            <a:srgbClr val="D71E28"/>
+          </a:solidFill>
+          <a:ln/>
+        </p:spPr>
+        <p:txBody>
+          <a:bodyPr/>
+          <a:lstStyle/>
+          <a:p>
+            <a:endParaRPr lang="en-US"/>
+          </a:p>
+        </p:txBody>
+      </p:sp>
+      <p:sp>
+        <p:nvSpPr>
+          <p:cNvPr id="79" name="Text 77"/>
+          <p:cNvSpPr/>
+          <p:nvPr/>
+        </p:nvSpPr>
+        <p:spPr>
+          <a:xfrm>
+            <a:off x="5303520" y="2907792"/>
+            <a:ext cx="1133856" cy="201168"/>
+          </a:xfrm>
+          <a:prstGeom prst="rect">
+            <a:avLst/>
+          </a:prstGeom>
+          <a:noFill/>
+          <a:ln/>
+        </p:spPr>
+        <p:txBody>
+          <a:bodyPr wrap="square" lIns="0" tIns="0" rIns="0" bIns="0" rtlCol="0" anchor="ctr"/>
+          <a:lstStyle/>
+          <a:p>
+            <a:pPr marL="0" indent="0">
+              <a:buNone/>
+            </a:pPr>
+            <a:r>
+              <a:rPr lang="en-US" sz="900" b="1" dirty="0">
+                <a:solidFill>
+                  <a:srgbClr val="263238"/>
+                </a:solidFill>
+                <a:latin typeface="Calibri" pitchFamily="34" charset="0"/>
+                <a:ea typeface="Calibri" pitchFamily="34" charset="-122"/>
+                <a:cs typeface="Calibri" pitchFamily="34" charset="-120"/>
+              </a:rPr>
+              <a:t>Retrieve</a:t>
+            </a:r>
+            <a:endParaRPr lang="en-US" sz="900" dirty="0"/>
+          </a:p>
+        </p:txBody>
+      </p:sp>
+      <p:sp>
+        <p:nvSpPr>
+          <p:cNvPr id="80" name="Text 78"/>
+          <p:cNvSpPr/>
+          <p:nvPr/>
+        </p:nvSpPr>
+        <p:spPr>
+          <a:xfrm>
+            <a:off x="5303520" y="3108960"/>
+            <a:ext cx="1133856" cy="201168"/>
+          </a:xfrm>
+          <a:prstGeom prst="rect">
+            <a:avLst/>
+          </a:prstGeom>
+          <a:noFill/>
+          <a:ln/>
+        </p:spPr>
+        <p:txBody>
+          <a:bodyPr wrap="square" lIns="0" tIns="0" rIns="0" bIns="0" rtlCol="0" anchor="t"/>
+          <a:lstStyle/>
+          <a:p>
+            <a:pPr marL="0" indent="0">
+              <a:buNone/>
+            </a:pPr>
+            <a:r>
+              <a:rPr lang="en-US" sz="650" dirty="0">
+                <a:solidFill>
+                  <a:srgbClr val="78909C"/>
+                </a:solidFill>
+                <a:latin typeface="Calibri" pitchFamily="34" charset="0"/>
+                <a:ea typeface="Calibri" pitchFamily="34" charset="-122"/>
+                <a:cs typeface="Calibri" pitchFamily="34" charset="-120"/>
+              </a:rPr>
+              <a:t>Agent queries MCPs,</a:t>
+            </a:r>
+            <a:endParaRPr lang="en-US" sz="650" dirty="0"/>
+          </a:p>
+          <a:p>
+            <a:pPr marL="0" indent="0">
+              <a:buNone/>
+            </a:pPr>
+            <a:r>
+              <a:rPr lang="en-US" sz="650" dirty="0">
+                <a:solidFill>
+                  <a:srgbClr val="78909C"/>
+                </a:solidFill>
+                <a:latin typeface="Calibri" pitchFamily="34" charset="0"/>
+                <a:ea typeface="Calibri" pitchFamily="34" charset="-122"/>
+                <a:cs typeface="Calibri" pitchFamily="34" charset="-120"/>
+              </a:rPr>
+              <a:t>APIs &amp; knowledge base</a:t>
+            </a:r>
+            <a:endParaRPr lang="en-US" sz="650" dirty="0"/>
+          </a:p>
+        </p:txBody>
+      </p:sp>
+      <p:sp>
+        <p:nvSpPr>
+          <p:cNvPr id="81" name="Shape 79"/>
+          <p:cNvSpPr/>
+          <p:nvPr/>
+        </p:nvSpPr>
+        <p:spPr>
+          <a:xfrm>
+            <a:off x="6784848" y="2852928"/>
+            <a:ext cx="1243584" cy="512064"/>
+          </a:xfrm>
+          <a:prstGeom prst="rect">
+            <a:avLst/>
+          </a:prstGeom>
+          <a:solidFill>
+            <a:srgbClr val="F5F5F5"/>
+          </a:solidFill>
+          <a:ln w="6350">
+            <a:solidFill>
+              <a:srgbClr val="E8E8E8"/>
+            </a:solidFill>
+            <a:prstDash val="solid"/>
+          </a:ln>
+          <a:effectLst>
+            <a:outerShdw blurRad="38100" dist="12700" dir="8100000" algn="bl" rotWithShape="0">
+              <a:srgbClr val="000000">
+                <a:alpha val="6000"/>
+              </a:srgbClr>
+            </a:outerShdw>
+          </a:effectLst>
+        </p:spPr>
+        <p:txBody>
+          <a:bodyPr/>
+          <a:lstStyle/>
+          <a:p>
+            <a:endParaRPr lang="en-US"/>
+          </a:p>
+        </p:txBody>
+      </p:sp>
+      <p:sp>
+        <p:nvSpPr>
+          <p:cNvPr id="82" name="Shape 80"/>
+          <p:cNvSpPr/>
+          <p:nvPr/>
+        </p:nvSpPr>
+        <p:spPr>
+          <a:xfrm>
+            <a:off x="6784848" y="2852928"/>
+            <a:ext cx="1243584" cy="27432"/>
+          </a:xfrm>
+          <a:prstGeom prst="rect">
+            <a:avLst/>
+          </a:prstGeom>
+          <a:solidFill>
+            <a:srgbClr val="D71E28"/>
+          </a:solidFill>
+          <a:ln/>
+        </p:spPr>
+        <p:txBody>
+          <a:bodyPr/>
+          <a:lstStyle/>
+          <a:p>
+            <a:endParaRPr lang="en-US"/>
+          </a:p>
+        </p:txBody>
+      </p:sp>
+      <p:sp>
+        <p:nvSpPr>
+          <p:cNvPr id="83" name="Text 81"/>
+          <p:cNvSpPr/>
+          <p:nvPr/>
+        </p:nvSpPr>
+        <p:spPr>
+          <a:xfrm>
+            <a:off x="6839712" y="2907792"/>
+            <a:ext cx="1133856" cy="201168"/>
+          </a:xfrm>
+          <a:prstGeom prst="rect">
+            <a:avLst/>
+          </a:prstGeom>
+          <a:noFill/>
+          <a:ln/>
+        </p:spPr>
+        <p:txBody>
+          <a:bodyPr wrap="square" lIns="0" tIns="0" rIns="0" bIns="0" rtlCol="0" anchor="ctr"/>
+          <a:lstStyle/>
+          <a:p>
+            <a:pPr marL="0" indent="0">
+              <a:buNone/>
+            </a:pPr>
+            <a:r>
+              <a:rPr lang="en-US" sz="900" b="1" dirty="0">
+                <a:solidFill>
+                  <a:srgbClr val="263238"/>
+                </a:solidFill>
+                <a:latin typeface="Calibri" pitchFamily="34" charset="0"/>
+                <a:ea typeface="Calibri" pitchFamily="34" charset="-122"/>
+                <a:cs typeface="Calibri" pitchFamily="34" charset="-120"/>
+              </a:rPr>
+              <a:t>Respond</a:t>
+            </a:r>
+            <a:endParaRPr lang="en-US" sz="900" dirty="0"/>
+          </a:p>
+        </p:txBody>
+      </p:sp>
+      <p:sp>
+        <p:nvSpPr>
+          <p:cNvPr id="84" name="Text 82"/>
+          <p:cNvSpPr/>
+          <p:nvPr/>
+        </p:nvSpPr>
+        <p:spPr>
+          <a:xfrm>
+            <a:off x="6839712" y="3108960"/>
+            <a:ext cx="1133856" cy="201168"/>
+          </a:xfrm>
+          <a:prstGeom prst="rect">
+            <a:avLst/>
+          </a:prstGeom>
+          <a:noFill/>
+          <a:ln/>
+        </p:spPr>
+        <p:txBody>
+          <a:bodyPr wrap="square" lIns="0" tIns="0" rIns="0" bIns="0" rtlCol="0" anchor="t"/>
+          <a:lstStyle/>
+          <a:p>
+            <a:pPr marL="0" indent="0">
+              <a:buNone/>
+            </a:pPr>
+            <a:r>
+              <a:rPr lang="en-US" sz="650" dirty="0">
+                <a:solidFill>
+                  <a:srgbClr val="78909C"/>
+                </a:solidFill>
+                <a:latin typeface="Calibri" pitchFamily="34" charset="0"/>
+                <a:ea typeface="Calibri" pitchFamily="34" charset="-122"/>
+                <a:cs typeface="Calibri" pitchFamily="34" charset="-120"/>
+              </a:rPr>
+              <a:t>Consolidated answer</a:t>
+            </a:r>
+            <a:endParaRPr lang="en-US" sz="650" dirty="0"/>
+          </a:p>
+          <a:p>
+            <a:pPr marL="0" indent="0">
+              <a:buNone/>
+            </a:pPr>
+            <a:r>
+              <a:rPr lang="en-US" sz="650" dirty="0">
+                <a:solidFill>
+                  <a:srgbClr val="78909C"/>
+                </a:solidFill>
+                <a:latin typeface="Calibri" pitchFamily="34" charset="0"/>
+                <a:ea typeface="Calibri" pitchFamily="34" charset="-122"/>
+                <a:cs typeface="Calibri" pitchFamily="34" charset="-120"/>
+              </a:rPr>
+              <a:t>with source citations</a:t>
+            </a:r>
+            <a:endParaRPr lang="en-US" sz="650" dirty="0"/>
+          </a:p>
+        </p:txBody>
+      </p:sp>
+      <p:sp>
+        <p:nvSpPr>
+          <p:cNvPr id="85" name="Shape 83"/>
+          <p:cNvSpPr/>
+          <p:nvPr/>
+        </p:nvSpPr>
+        <p:spPr>
+          <a:xfrm>
+            <a:off x="1920240" y="3108960"/>
+            <a:ext cx="219456" cy="0"/>
+          </a:xfrm>
+          <a:prstGeom prst="line">
+            <a:avLst/>
+          </a:prstGeom>
+          <a:noFill/>
+          <a:ln w="12700">
+            <a:solidFill>
+              <a:srgbClr val="D71E28"/>
+            </a:solidFill>
+            <a:prstDash val="solid"/>
+            <a:tailEnd type="triangle"/>
+          </a:ln>
+        </p:spPr>
+        <p:txBody>
+          <a:bodyPr/>
+          <a:lstStyle/>
+          <a:p>
+            <a:endParaRPr lang="en-US"/>
+          </a:p>
+        </p:txBody>
+      </p:sp>
+      <p:sp>
+        <p:nvSpPr>
+          <p:cNvPr id="86" name="Shape 84"/>
+          <p:cNvSpPr/>
+          <p:nvPr/>
+        </p:nvSpPr>
+        <p:spPr>
+          <a:xfrm>
+            <a:off x="3456432" y="3108960"/>
+            <a:ext cx="219456" cy="0"/>
+          </a:xfrm>
+          <a:prstGeom prst="line">
+            <a:avLst/>
+          </a:prstGeom>
+          <a:noFill/>
+          <a:ln w="12700">
+            <a:solidFill>
+              <a:srgbClr val="D71E28"/>
+            </a:solidFill>
+            <a:prstDash val="solid"/>
+            <a:tailEnd type="triangle"/>
+          </a:ln>
+        </p:spPr>
+        <p:txBody>
+          <a:bodyPr/>
+          <a:lstStyle/>
+          <a:p>
+            <a:endParaRPr lang="en-US"/>
+          </a:p>
+        </p:txBody>
+      </p:sp>
+      <p:sp>
+        <p:nvSpPr>
+          <p:cNvPr id="87" name="Shape 85"/>
+          <p:cNvSpPr/>
+          <p:nvPr/>
+        </p:nvSpPr>
+        <p:spPr>
+          <a:xfrm>
+            <a:off x="4992624" y="3108960"/>
+            <a:ext cx="219456" cy="0"/>
+          </a:xfrm>
+          <a:prstGeom prst="line">
+            <a:avLst/>
+          </a:prstGeom>
+          <a:noFill/>
+          <a:ln w="12700">
+            <a:solidFill>
+              <a:srgbClr val="D71E28"/>
+            </a:solidFill>
+            <a:prstDash val="solid"/>
+            <a:tailEnd type="triangle"/>
+          </a:ln>
+        </p:spPr>
+        <p:txBody>
+          <a:bodyPr/>
+          <a:lstStyle/>
+          <a:p>
+            <a:endParaRPr lang="en-US"/>
+          </a:p>
+        </p:txBody>
+      </p:sp>
+      <p:sp>
+        <p:nvSpPr>
+          <p:cNvPr id="88" name="Shape 86"/>
+          <p:cNvSpPr/>
+          <p:nvPr/>
+        </p:nvSpPr>
+        <p:spPr>
+          <a:xfrm>
+            <a:off x="6528816" y="3108960"/>
+            <a:ext cx="219456" cy="0"/>
+          </a:xfrm>
+          <a:prstGeom prst="line">
+            <a:avLst/>
+          </a:prstGeom>
+          <a:noFill/>
+          <a:ln w="12700">
+            <a:solidFill>
+              <a:srgbClr val="D71E28"/>
+            </a:solidFill>
+            <a:prstDash val="solid"/>
+            <a:tailEnd type="triangle"/>
+          </a:ln>
+        </p:spPr>
+        <p:txBody>
+          <a:bodyPr/>
+          <a:lstStyle/>
+          <a:p>
+            <a:endParaRPr lang="en-US"/>
+          </a:p>
+        </p:txBody>
+      </p:sp>
+      <p:sp>
+        <p:nvSpPr>
+          <p:cNvPr id="89" name="Shape 87"/>
+          <p:cNvSpPr/>
+          <p:nvPr/>
+        </p:nvSpPr>
+        <p:spPr>
+          <a:xfrm>
+            <a:off x="7406640" y="3364992"/>
+            <a:ext cx="0" cy="128016"/>
+          </a:xfrm>
+          <a:prstGeom prst="line">
+            <a:avLst/>
+          </a:prstGeom>
+          <a:noFill/>
+          <a:ln w="10160">
+            <a:solidFill>
+              <a:srgbClr val="BDBDBD"/>
+            </a:solidFill>
+            <a:prstDash val="dash"/>
+          </a:ln>
+        </p:spPr>
+        <p:txBody>
+          <a:bodyPr/>
+          <a:lstStyle/>
+          <a:p>
+            <a:endParaRPr lang="en-US"/>
+          </a:p>
+        </p:txBody>
+      </p:sp>
+      <p:sp>
+        <p:nvSpPr>
+          <p:cNvPr id="90" name="Shape 88"/>
+          <p:cNvSpPr/>
+          <p:nvPr/>
+        </p:nvSpPr>
+        <p:spPr>
+          <a:xfrm>
+            <a:off x="2798064" y="3493008"/>
+            <a:ext cx="4608576" cy="0"/>
+          </a:xfrm>
+          <a:prstGeom prst="line">
+            <a:avLst/>
+          </a:prstGeom>
+          <a:noFill/>
+          <a:ln w="10160">
+            <a:solidFill>
+              <a:srgbClr val="BDBDBD"/>
+            </a:solidFill>
+            <a:prstDash val="dash"/>
+          </a:ln>
+        </p:spPr>
+        <p:txBody>
+          <a:bodyPr/>
+          <a:lstStyle/>
+          <a:p>
+            <a:endParaRPr lang="en-US"/>
+          </a:p>
+        </p:txBody>
+      </p:sp>
+      <p:sp>
+        <p:nvSpPr>
+          <p:cNvPr id="91" name="Shape 89"/>
+          <p:cNvSpPr/>
+          <p:nvPr/>
+        </p:nvSpPr>
+        <p:spPr>
+          <a:xfrm>
+            <a:off x="2798064" y="3493008"/>
+            <a:ext cx="0" cy="0"/>
+          </a:xfrm>
+          <a:prstGeom prst="line">
+            <a:avLst/>
+          </a:prstGeom>
+          <a:noFill/>
+          <a:ln w="10160">
+            <a:solidFill>
+              <a:srgbClr val="BDBDBD"/>
+            </a:solidFill>
+            <a:prstDash val="dash"/>
+            <a:tailEnd type="triangle"/>
+          </a:ln>
+        </p:spPr>
+        <p:txBody>
+          <a:bodyPr/>
+          <a:lstStyle/>
+          <a:p>
+            <a:endParaRPr lang="en-US"/>
+          </a:p>
+        </p:txBody>
+      </p:sp>
+      <p:sp>
+        <p:nvSpPr>
+          <p:cNvPr id="92" name="Text 90"/>
+          <p:cNvSpPr/>
+          <p:nvPr/>
+        </p:nvSpPr>
+        <p:spPr>
+          <a:xfrm>
+            <a:off x="4736592" y="3502152"/>
+            <a:ext cx="731520" cy="128016"/>
+          </a:xfrm>
+          <a:prstGeom prst="rect">
+            <a:avLst/>
+          </a:prstGeom>
+          <a:noFill/>
+          <a:ln/>
+        </p:spPr>
+        <p:txBody>
+          <a:bodyPr wrap="square" lIns="0" tIns="0" rIns="0" bIns="0" rtlCol="0" anchor="ctr"/>
+          <a:lstStyle/>
+          <a:p>
+            <a:pPr marL="0" indent="0" algn="ctr">
+              <a:buNone/>
+            </a:pPr>
+            <a:r>
+              <a:rPr lang="en-US" sz="600" i="1" dirty="0">
+                <a:solidFill>
+                  <a:srgbClr val="78909C"/>
+                </a:solidFill>
+                <a:latin typeface="Calibri" pitchFamily="34" charset="0"/>
+                <a:ea typeface="Calibri" pitchFamily="34" charset="-122"/>
+                <a:cs typeface="Calibri" pitchFamily="34" charset="-120"/>
+              </a:rPr>
+              <a:t>Follow-up</a:t>
+            </a:r>
+            <a:endParaRPr lang="en-US" sz="600" dirty="0"/>
+          </a:p>
+        </p:txBody>
+      </p:sp>
+      <p:sp>
+        <p:nvSpPr>
+          <p:cNvPr id="93" name="Shape 91"/>
           <p:cNvSpPr/>
           <p:nvPr/>
         </p:nvSpPr>

--- a/AgentFramework  -  Final.pptx
+++ b/AgentFramework  -  Final.pptx
@@ -140,7 +140,7 @@
     </p:spTree>
     <p:extLst>
       <p:ext uri="{BB962C8B-B14F-4D97-AF65-F5344CB8AC3E}">
-        <p14:creationId xmlns:p14="http://schemas.microsoft.com/office/powerpoint/2010/main" val="1563181401"/>
+        <p14:creationId xmlns:p14="http://schemas.microsoft.com/office/powerpoint/2010/main" val="1044522728"/>
       </p:ext>
     </p:extLst>
   </p:cSld>
@@ -7881,8 +7881,8 @@
         </p:nvSpPr>
         <p:spPr>
           <a:xfrm>
-            <a:off x="548640" y="841248"/>
-            <a:ext cx="3657600" cy="164592"/>
+            <a:off x="502920" y="950976"/>
+            <a:ext cx="4114800" cy="201168"/>
           </a:xfrm>
           <a:prstGeom prst="rect">
             <a:avLst/>
@@ -7898,7 +7898,7 @@
               <a:buNone/>
             </a:pPr>
             <a:r>
-              <a:rPr lang="en-US" sz="700" b="1" kern="0" spc="200" dirty="0">
+              <a:rPr lang="en-US" sz="800" b="1" kern="0" spc="200" dirty="0">
                 <a:solidFill>
                   <a:srgbClr val="00897B"/>
                 </a:solidFill>
@@ -7908,7 +7908,7 @@
               </a:rPr>
               <a:t>SERVICE  PROVIDER  ONBOARDING</a:t>
             </a:r>
-            <a:endParaRPr lang="en-US" sz="700" dirty="0"/>
+            <a:endParaRPr lang="en-US" sz="800" dirty="0"/>
           </a:p>
         </p:txBody>
       </p:sp>
@@ -7920,8 +7920,8 @@
         </p:nvSpPr>
         <p:spPr>
           <a:xfrm>
-            <a:off x="640080" y="1371600"/>
-            <a:ext cx="1243584" cy="512064"/>
+            <a:off x="502920" y="1536192"/>
+            <a:ext cx="1426464" cy="658368"/>
           </a:xfrm>
           <a:prstGeom prst="rect">
             <a:avLst/>
@@ -7959,8 +7959,8 @@
         </p:nvSpPr>
         <p:spPr>
           <a:xfrm>
-            <a:off x="640080" y="1371600"/>
-            <a:ext cx="1243584" cy="27432"/>
+            <a:off x="502920" y="1536192"/>
+            <a:ext cx="1426464" cy="32004"/>
           </a:xfrm>
           <a:prstGeom prst="rect">
             <a:avLst/>
@@ -7986,8 +7986,8 @@
         </p:nvSpPr>
         <p:spPr>
           <a:xfrm>
-            <a:off x="694944" y="1426464"/>
-            <a:ext cx="1133856" cy="201168"/>
+            <a:off x="576072" y="1600200"/>
+            <a:ext cx="1280160" cy="237744"/>
           </a:xfrm>
           <a:prstGeom prst="rect">
             <a:avLst/>
@@ -8003,7 +8003,7 @@
               <a:buNone/>
             </a:pPr>
             <a:r>
-              <a:rPr lang="en-US" sz="900" b="1" dirty="0">
+              <a:rPr lang="en-US" sz="1100" b="1" dirty="0">
                 <a:solidFill>
                   <a:srgbClr val="263238"/>
                 </a:solidFill>
@@ -8013,7 +8013,7 @@
               </a:rPr>
               <a:t>Submit</a:t>
             </a:r>
-            <a:endParaRPr lang="en-US" sz="900" dirty="0"/>
+            <a:endParaRPr lang="en-US" sz="1100" dirty="0"/>
           </a:p>
         </p:txBody>
       </p:sp>
@@ -8025,8 +8025,8 @@
         </p:nvSpPr>
         <p:spPr>
           <a:xfrm>
-            <a:off x="694944" y="1627632"/>
-            <a:ext cx="1133856" cy="201168"/>
+            <a:off x="576072" y="1847088"/>
+            <a:ext cx="1280160" cy="274320"/>
           </a:xfrm>
           <a:prstGeom prst="rect">
             <a:avLst/>
@@ -8042,7 +8042,7 @@
               <a:buNone/>
             </a:pPr>
             <a:r>
-              <a:rPr lang="en-US" sz="650" dirty="0">
+              <a:rPr lang="en-US" sz="750" dirty="0">
                 <a:solidFill>
                   <a:srgbClr val="78909C"/>
                 </a:solidFill>
@@ -8052,14 +8052,14 @@
               </a:rPr>
               <a:t>Service team submits</a:t>
             </a:r>
-            <a:endParaRPr lang="en-US" sz="650" dirty="0"/>
-          </a:p>
-          <a:p>
-            <a:pPr marL="0" indent="0">
-              <a:buNone/>
-            </a:pPr>
-            <a:r>
-              <a:rPr lang="en-US" sz="650" dirty="0">
+            <a:endParaRPr lang="en-US" sz="750" dirty="0"/>
+          </a:p>
+          <a:p>
+            <a:pPr marL="0" indent="0">
+              <a:buNone/>
+            </a:pPr>
+            <a:r>
+              <a:rPr lang="en-US" sz="750" dirty="0">
                 <a:solidFill>
                   <a:srgbClr val="78909C"/>
                 </a:solidFill>
@@ -8069,7 +8069,7 @@
               </a:rPr>
               <a:t>agent proposal &amp; use case</a:t>
             </a:r>
-            <a:endParaRPr lang="en-US" sz="650" dirty="0"/>
+            <a:endParaRPr lang="en-US" sz="750" dirty="0"/>
           </a:p>
         </p:txBody>
       </p:sp>
@@ -8081,8 +8081,8 @@
         </p:nvSpPr>
         <p:spPr>
           <a:xfrm>
-            <a:off x="2176272" y="1371600"/>
-            <a:ext cx="1243584" cy="512064"/>
+            <a:off x="2130552" y="1536192"/>
+            <a:ext cx="1426464" cy="658368"/>
           </a:xfrm>
           <a:prstGeom prst="rect">
             <a:avLst/>
@@ -8120,8 +8120,8 @@
         </p:nvSpPr>
         <p:spPr>
           <a:xfrm>
-            <a:off x="2176272" y="1371600"/>
-            <a:ext cx="1243584" cy="27432"/>
+            <a:off x="2130552" y="1536192"/>
+            <a:ext cx="1426464" cy="32004"/>
           </a:xfrm>
           <a:prstGeom prst="rect">
             <a:avLst/>
@@ -8147,8 +8147,8 @@
         </p:nvSpPr>
         <p:spPr>
           <a:xfrm>
-            <a:off x="2231136" y="1426464"/>
-            <a:ext cx="1133856" cy="201168"/>
+            <a:off x="2203704" y="1600200"/>
+            <a:ext cx="1280160" cy="237744"/>
           </a:xfrm>
           <a:prstGeom prst="rect">
             <a:avLst/>
@@ -8164,7 +8164,7 @@
               <a:buNone/>
             </a:pPr>
             <a:r>
-              <a:rPr lang="en-US" sz="900" b="1" dirty="0">
+              <a:rPr lang="en-US" sz="1100" b="1" dirty="0">
                 <a:solidFill>
                   <a:srgbClr val="263238"/>
                 </a:solidFill>
@@ -8174,7 +8174,7 @@
               </a:rPr>
               <a:t>Review</a:t>
             </a:r>
-            <a:endParaRPr lang="en-US" sz="900" dirty="0"/>
+            <a:endParaRPr lang="en-US" sz="1100" dirty="0"/>
           </a:p>
         </p:txBody>
       </p:sp>
@@ -8186,8 +8186,8 @@
         </p:nvSpPr>
         <p:spPr>
           <a:xfrm>
-            <a:off x="2231136" y="1627632"/>
-            <a:ext cx="1133856" cy="201168"/>
+            <a:off x="2203704" y="1847088"/>
+            <a:ext cx="1280160" cy="274320"/>
           </a:xfrm>
           <a:prstGeom prst="rect">
             <a:avLst/>
@@ -8203,7 +8203,7 @@
               <a:buNone/>
             </a:pPr>
             <a:r>
-              <a:rPr lang="en-US" sz="650" dirty="0">
+              <a:rPr lang="en-US" sz="750" dirty="0">
                 <a:solidFill>
                   <a:srgbClr val="78909C"/>
                 </a:solidFill>
@@ -8213,14 +8213,14 @@
               </a:rPr>
               <a:t>Dual-gate review:</a:t>
             </a:r>
-            <a:endParaRPr lang="en-US" sz="650" dirty="0"/>
-          </a:p>
-          <a:p>
-            <a:pPr marL="0" indent="0">
-              <a:buNone/>
-            </a:pPr>
-            <a:r>
-              <a:rPr lang="en-US" sz="650" dirty="0">
+            <a:endParaRPr lang="en-US" sz="750" dirty="0"/>
+          </a:p>
+          <a:p>
+            <a:pPr marL="0" indent="0">
+              <a:buNone/>
+            </a:pPr>
+            <a:r>
+              <a:rPr lang="en-US" sz="750" dirty="0">
                 <a:solidFill>
                   <a:srgbClr val="78909C"/>
                 </a:solidFill>
@@ -8230,7 +8230,7 @@
               </a:rPr>
               <a:t>content &amp; functional</a:t>
             </a:r>
-            <a:endParaRPr lang="en-US" sz="650" dirty="0"/>
+            <a:endParaRPr lang="en-US" sz="750" dirty="0"/>
           </a:p>
         </p:txBody>
       </p:sp>
@@ -8242,8 +8242,8 @@
         </p:nvSpPr>
         <p:spPr>
           <a:xfrm>
-            <a:off x="3712464" y="1371600"/>
-            <a:ext cx="1243584" cy="512064"/>
+            <a:off x="3758184" y="1536192"/>
+            <a:ext cx="1426464" cy="658368"/>
           </a:xfrm>
           <a:prstGeom prst="rect">
             <a:avLst/>
@@ -8281,8 +8281,8 @@
         </p:nvSpPr>
         <p:spPr>
           <a:xfrm>
-            <a:off x="3712464" y="1371600"/>
-            <a:ext cx="1243584" cy="27432"/>
+            <a:off x="3758184" y="1536192"/>
+            <a:ext cx="1426464" cy="32004"/>
           </a:xfrm>
           <a:prstGeom prst="rect">
             <a:avLst/>
@@ -8308,8 +8308,8 @@
         </p:nvSpPr>
         <p:spPr>
           <a:xfrm>
-            <a:off x="3767328" y="1426464"/>
-            <a:ext cx="1133856" cy="201168"/>
+            <a:off x="3831336" y="1600200"/>
+            <a:ext cx="1280160" cy="237744"/>
           </a:xfrm>
           <a:prstGeom prst="rect">
             <a:avLst/>
@@ -8325,7 +8325,7 @@
               <a:buNone/>
             </a:pPr>
             <a:r>
-              <a:rPr lang="en-US" sz="900" b="1" dirty="0">
+              <a:rPr lang="en-US" sz="1100" b="1" dirty="0">
                 <a:solidFill>
                   <a:srgbClr val="263238"/>
                 </a:solidFill>
@@ -8335,7 +8335,7 @@
               </a:rPr>
               <a:t>Approve</a:t>
             </a:r>
-            <a:endParaRPr lang="en-US" sz="900" dirty="0"/>
+            <a:endParaRPr lang="en-US" sz="1100" dirty="0"/>
           </a:p>
         </p:txBody>
       </p:sp>
@@ -8347,8 +8347,8 @@
         </p:nvSpPr>
         <p:spPr>
           <a:xfrm>
-            <a:off x="3767328" y="1627632"/>
-            <a:ext cx="1133856" cy="201168"/>
+            <a:off x="3831336" y="1847088"/>
+            <a:ext cx="1280160" cy="274320"/>
           </a:xfrm>
           <a:prstGeom prst="rect">
             <a:avLst/>
@@ -8364,7 +8364,7 @@
               <a:buNone/>
             </a:pPr>
             <a:r>
-              <a:rPr lang="en-US" sz="650" dirty="0">
+              <a:rPr lang="en-US" sz="750" dirty="0">
                 <a:solidFill>
                   <a:srgbClr val="78909C"/>
                 </a:solidFill>
@@ -8374,14 +8374,14 @@
               </a:rPr>
               <a:t>Agent approved for</a:t>
             </a:r>
-            <a:endParaRPr lang="en-US" sz="650" dirty="0"/>
-          </a:p>
-          <a:p>
-            <a:pPr marL="0" indent="0">
-              <a:buNone/>
-            </a:pPr>
-            <a:r>
-              <a:rPr lang="en-US" sz="650" dirty="0">
+            <a:endParaRPr lang="en-US" sz="750" dirty="0"/>
+          </a:p>
+          <a:p>
+            <a:pPr marL="0" indent="0">
+              <a:buNone/>
+            </a:pPr>
+            <a:r>
+              <a:rPr lang="en-US" sz="750" dirty="0">
                 <a:solidFill>
                   <a:srgbClr val="78909C"/>
                 </a:solidFill>
@@ -8391,7 +8391,7 @@
               </a:rPr>
               <a:t>integration into framework</a:t>
             </a:r>
-            <a:endParaRPr lang="en-US" sz="650" dirty="0"/>
+            <a:endParaRPr lang="en-US" sz="750" dirty="0"/>
           </a:p>
         </p:txBody>
       </p:sp>
@@ -8403,8 +8403,8 @@
         </p:nvSpPr>
         <p:spPr>
           <a:xfrm>
-            <a:off x="5248656" y="1371600"/>
-            <a:ext cx="1243584" cy="512064"/>
+            <a:off x="5385816" y="1536192"/>
+            <a:ext cx="1426464" cy="658368"/>
           </a:xfrm>
           <a:prstGeom prst="rect">
             <a:avLst/>
@@ -8442,8 +8442,8 @@
         </p:nvSpPr>
         <p:spPr>
           <a:xfrm>
-            <a:off x="5248656" y="1371600"/>
-            <a:ext cx="1243584" cy="27432"/>
+            <a:off x="5385816" y="1536192"/>
+            <a:ext cx="1426464" cy="32004"/>
           </a:xfrm>
           <a:prstGeom prst="rect">
             <a:avLst/>
@@ -8469,8 +8469,8 @@
         </p:nvSpPr>
         <p:spPr>
           <a:xfrm>
-            <a:off x="5303520" y="1426464"/>
-            <a:ext cx="1133856" cy="201168"/>
+            <a:off x="5458968" y="1600200"/>
+            <a:ext cx="1280160" cy="237744"/>
           </a:xfrm>
           <a:prstGeom prst="rect">
             <a:avLst/>
@@ -8486,7 +8486,7 @@
               <a:buNone/>
             </a:pPr>
             <a:r>
-              <a:rPr lang="en-US" sz="900" b="1" dirty="0">
+              <a:rPr lang="en-US" sz="1100" b="1" dirty="0">
                 <a:solidFill>
                   <a:srgbClr val="263238"/>
                 </a:solidFill>
@@ -8496,7 +8496,7 @@
               </a:rPr>
               <a:t>Integrate</a:t>
             </a:r>
-            <a:endParaRPr lang="en-US" sz="900" dirty="0"/>
+            <a:endParaRPr lang="en-US" sz="1100" dirty="0"/>
           </a:p>
         </p:txBody>
       </p:sp>
@@ -8508,8 +8508,8 @@
         </p:nvSpPr>
         <p:spPr>
           <a:xfrm>
-            <a:off x="5303520" y="1627632"/>
-            <a:ext cx="1133856" cy="201168"/>
+            <a:off x="5458968" y="1847088"/>
+            <a:ext cx="1280160" cy="274320"/>
           </a:xfrm>
           <a:prstGeom prst="rect">
             <a:avLst/>
@@ -8525,7 +8525,7 @@
               <a:buNone/>
             </a:pPr>
             <a:r>
-              <a:rPr lang="en-US" sz="650" dirty="0">
+              <a:rPr lang="en-US" sz="750" dirty="0">
                 <a:solidFill>
                   <a:srgbClr val="78909C"/>
                 </a:solidFill>
@@ -8535,14 +8535,14 @@
               </a:rPr>
               <a:t>MCP &amp; documentation</a:t>
             </a:r>
-            <a:endParaRPr lang="en-US" sz="650" dirty="0"/>
-          </a:p>
-          <a:p>
-            <a:pPr marL="0" indent="0">
-              <a:buNone/>
-            </a:pPr>
-            <a:r>
-              <a:rPr lang="en-US" sz="650" dirty="0">
+            <a:endParaRPr lang="en-US" sz="750" dirty="0"/>
+          </a:p>
+          <a:p>
+            <a:pPr marL="0" indent="0">
+              <a:buNone/>
+            </a:pPr>
+            <a:r>
+              <a:rPr lang="en-US" sz="750" dirty="0">
                 <a:solidFill>
                   <a:srgbClr val="78909C"/>
                 </a:solidFill>
@@ -8552,7 +8552,7 @@
               </a:rPr>
               <a:t>onboarding paths</a:t>
             </a:r>
-            <a:endParaRPr lang="en-US" sz="650" dirty="0"/>
+            <a:endParaRPr lang="en-US" sz="750" dirty="0"/>
           </a:p>
         </p:txBody>
       </p:sp>
@@ -8564,8 +8564,8 @@
         </p:nvSpPr>
         <p:spPr>
           <a:xfrm>
-            <a:off x="6784848" y="1371600"/>
-            <a:ext cx="1243584" cy="512064"/>
+            <a:off x="7013448" y="1536192"/>
+            <a:ext cx="1426464" cy="658368"/>
           </a:xfrm>
           <a:prstGeom prst="rect">
             <a:avLst/>
@@ -8603,8 +8603,8 @@
         </p:nvSpPr>
         <p:spPr>
           <a:xfrm>
-            <a:off x="6784848" y="1371600"/>
-            <a:ext cx="1243584" cy="27432"/>
+            <a:off x="7013448" y="1536192"/>
+            <a:ext cx="1426464" cy="32004"/>
           </a:xfrm>
           <a:prstGeom prst="rect">
             <a:avLst/>
@@ -8630,8 +8630,8 @@
         </p:nvSpPr>
         <p:spPr>
           <a:xfrm>
-            <a:off x="6839712" y="1426464"/>
-            <a:ext cx="1133856" cy="201168"/>
+            <a:off x="7086600" y="1600200"/>
+            <a:ext cx="1280160" cy="237744"/>
           </a:xfrm>
           <a:prstGeom prst="rect">
             <a:avLst/>
@@ -8647,7 +8647,7 @@
               <a:buNone/>
             </a:pPr>
             <a:r>
-              <a:rPr lang="en-US" sz="900" b="1" dirty="0">
+              <a:rPr lang="en-US" sz="1100" b="1" dirty="0">
                 <a:solidFill>
                   <a:srgbClr val="263238"/>
                 </a:solidFill>
@@ -8657,7 +8657,7 @@
               </a:rPr>
               <a:t>Evaluate</a:t>
             </a:r>
-            <a:endParaRPr lang="en-US" sz="900" dirty="0"/>
+            <a:endParaRPr lang="en-US" sz="1100" dirty="0"/>
           </a:p>
         </p:txBody>
       </p:sp>
@@ -8669,8 +8669,8 @@
         </p:nvSpPr>
         <p:spPr>
           <a:xfrm>
-            <a:off x="6839712" y="1627632"/>
-            <a:ext cx="1133856" cy="201168"/>
+            <a:off x="7086600" y="1847088"/>
+            <a:ext cx="1280160" cy="274320"/>
           </a:xfrm>
           <a:prstGeom prst="rect">
             <a:avLst/>
@@ -8686,7 +8686,7 @@
               <a:buNone/>
             </a:pPr>
             <a:r>
-              <a:rPr lang="en-US" sz="650" dirty="0">
+              <a:rPr lang="en-US" sz="750" dirty="0">
                 <a:solidFill>
                   <a:srgbClr val="78909C"/>
                 </a:solidFill>
@@ -8696,14 +8696,14 @@
               </a:rPr>
               <a:t>Quality, hallucination &amp;</a:t>
             </a:r>
-            <a:endParaRPr lang="en-US" sz="650" dirty="0"/>
-          </a:p>
-          <a:p>
-            <a:pPr marL="0" indent="0">
-              <a:buNone/>
-            </a:pPr>
-            <a:r>
-              <a:rPr lang="en-US" sz="650" dirty="0">
+            <a:endParaRPr lang="en-US" sz="750" dirty="0"/>
+          </a:p>
+          <a:p>
+            <a:pPr marL="0" indent="0">
+              <a:buNone/>
+            </a:pPr>
+            <a:r>
+              <a:rPr lang="en-US" sz="750" dirty="0">
                 <a:solidFill>
                   <a:srgbClr val="78909C"/>
                 </a:solidFill>
@@ -8713,7 +8713,7 @@
               </a:rPr>
               <a:t>performance validation</a:t>
             </a:r>
-            <a:endParaRPr lang="en-US" sz="650" dirty="0"/>
+            <a:endParaRPr lang="en-US" sz="750" dirty="0"/>
           </a:p>
         </p:txBody>
       </p:sp>
@@ -8725,8 +8725,8 @@
         </p:nvSpPr>
         <p:spPr>
           <a:xfrm>
-            <a:off x="1920240" y="1627632"/>
-            <a:ext cx="219456" cy="0"/>
+            <a:off x="1965960" y="1865376"/>
+            <a:ext cx="128016" cy="0"/>
           </a:xfrm>
           <a:prstGeom prst="line">
             <a:avLst/>
@@ -8756,8 +8756,8 @@
         </p:nvSpPr>
         <p:spPr>
           <a:xfrm>
-            <a:off x="3456432" y="1627632"/>
-            <a:ext cx="219456" cy="0"/>
+            <a:off x="3593592" y="1865376"/>
+            <a:ext cx="128016" cy="0"/>
           </a:xfrm>
           <a:prstGeom prst="line">
             <a:avLst/>
@@ -8787,8 +8787,8 @@
         </p:nvSpPr>
         <p:spPr>
           <a:xfrm>
-            <a:off x="4992624" y="1627632"/>
-            <a:ext cx="219456" cy="0"/>
+            <a:off x="5221224" y="1865376"/>
+            <a:ext cx="128016" cy="0"/>
           </a:xfrm>
           <a:prstGeom prst="line">
             <a:avLst/>
@@ -8818,8 +8818,8 @@
         </p:nvSpPr>
         <p:spPr>
           <a:xfrm>
-            <a:off x="6528816" y="1627632"/>
-            <a:ext cx="219456" cy="0"/>
+            <a:off x="6848856" y="1865376"/>
+            <a:ext cx="128016" cy="0"/>
           </a:xfrm>
           <a:prstGeom prst="line">
             <a:avLst/>
@@ -8849,7 +8849,7 @@
         </p:nvSpPr>
         <p:spPr>
           <a:xfrm>
-            <a:off x="2798064" y="1883664"/>
+            <a:off x="2843784" y="2194560"/>
             <a:ext cx="0" cy="91440"/>
           </a:xfrm>
           <a:prstGeom prst="line">
@@ -8879,12 +8879,12 @@
         </p:nvSpPr>
         <p:spPr>
           <a:xfrm>
-            <a:off x="2176272" y="1975104"/>
-            <a:ext cx="566928" cy="128016"/>
+            <a:off x="2130552" y="2286000"/>
+            <a:ext cx="658368" cy="155448"/>
           </a:xfrm>
           <a:prstGeom prst="roundRect">
             <a:avLst>
-              <a:gd name="adj" fmla="val 14286"/>
+              <a:gd name="adj" fmla="val 11765"/>
             </a:avLst>
           </a:prstGeom>
           <a:solidFill>
@@ -8913,8 +8913,8 @@
         </p:nvSpPr>
         <p:spPr>
           <a:xfrm>
-            <a:off x="2176272" y="1975104"/>
-            <a:ext cx="566928" cy="128016"/>
+            <a:off x="2130552" y="2286000"/>
+            <a:ext cx="658368" cy="155448"/>
           </a:xfrm>
           <a:prstGeom prst="rect">
             <a:avLst/>
@@ -8930,7 +8930,7 @@
               <a:buNone/>
             </a:pPr>
             <a:r>
-              <a:rPr lang="en-US" sz="550" b="1" dirty="0">
+              <a:rPr lang="en-US" sz="650" b="1" dirty="0">
                 <a:solidFill>
                   <a:srgbClr val="00897B"/>
                 </a:solidFill>
@@ -8940,7 +8940,7 @@
               </a:rPr>
               <a:t>Content</a:t>
             </a:r>
-            <a:endParaRPr lang="en-US" sz="550" dirty="0"/>
+            <a:endParaRPr lang="en-US" sz="650" dirty="0"/>
           </a:p>
         </p:txBody>
       </p:sp>
@@ -8952,7 +8952,7 @@
         </p:nvSpPr>
         <p:spPr>
           <a:xfrm>
-            <a:off x="2752344" y="2039112"/>
+            <a:off x="2798064" y="2363724"/>
             <a:ext cx="91440" cy="0"/>
           </a:xfrm>
           <a:prstGeom prst="line">
@@ -8983,12 +8983,12 @@
         </p:nvSpPr>
         <p:spPr>
           <a:xfrm>
-            <a:off x="2852928" y="1975104"/>
-            <a:ext cx="566928" cy="128016"/>
+            <a:off x="2898648" y="2286000"/>
+            <a:ext cx="658368" cy="155448"/>
           </a:xfrm>
           <a:prstGeom prst="roundRect">
             <a:avLst>
-              <a:gd name="adj" fmla="val 14286"/>
+              <a:gd name="adj" fmla="val 11765"/>
             </a:avLst>
           </a:prstGeom>
           <a:solidFill>
@@ -9017,8 +9017,8 @@
         </p:nvSpPr>
         <p:spPr>
           <a:xfrm>
-            <a:off x="2852928" y="1975104"/>
-            <a:ext cx="566928" cy="128016"/>
+            <a:off x="2898648" y="2286000"/>
+            <a:ext cx="658368" cy="155448"/>
           </a:xfrm>
           <a:prstGeom prst="rect">
             <a:avLst/>
@@ -9034,7 +9034,7 @@
               <a:buNone/>
             </a:pPr>
             <a:r>
-              <a:rPr lang="en-US" sz="550" b="1" dirty="0">
+              <a:rPr lang="en-US" sz="650" b="1" dirty="0">
                 <a:solidFill>
                   <a:srgbClr val="00897B"/>
                 </a:solidFill>
@@ -9044,7 +9044,7 @@
               </a:rPr>
               <a:t>Functional</a:t>
             </a:r>
-            <a:endParaRPr lang="en-US" sz="550" dirty="0"/>
+            <a:endParaRPr lang="en-US" sz="650" dirty="0"/>
           </a:p>
         </p:txBody>
       </p:sp>
@@ -9056,7 +9056,7 @@
         </p:nvSpPr>
         <p:spPr>
           <a:xfrm>
-            <a:off x="5870448" y="1883664"/>
+            <a:off x="6099048" y="2194560"/>
             <a:ext cx="0" cy="91440"/>
           </a:xfrm>
           <a:prstGeom prst="line">
@@ -9086,8 +9086,8 @@
         </p:nvSpPr>
         <p:spPr>
           <a:xfrm>
-            <a:off x="5248656" y="1975104"/>
-            <a:ext cx="256032" cy="128016"/>
+            <a:off x="5385816" y="2286000"/>
+            <a:ext cx="310896" cy="155448"/>
           </a:xfrm>
           <a:prstGeom prst="rect">
             <a:avLst/>
@@ -9103,7 +9103,7 @@
               <a:buNone/>
             </a:pPr>
             <a:r>
-              <a:rPr lang="en-US" sz="500" b="1" dirty="0">
+              <a:rPr lang="en-US" sz="600" b="1" dirty="0">
                 <a:solidFill>
                   <a:srgbClr val="78909C"/>
                 </a:solidFill>
@@ -9113,7 +9113,7 @@
               </a:rPr>
               <a:t>MCP</a:t>
             </a:r>
-            <a:endParaRPr lang="en-US" sz="500" dirty="0"/>
+            <a:endParaRPr lang="en-US" sz="600" dirty="0"/>
           </a:p>
         </p:txBody>
       </p:sp>
@@ -9125,12 +9125,12 @@
         </p:nvSpPr>
         <p:spPr>
           <a:xfrm>
-            <a:off x="5504688" y="1975104"/>
-            <a:ext cx="256032" cy="128016"/>
+            <a:off x="5696712" y="2286000"/>
+            <a:ext cx="298704" cy="155448"/>
           </a:xfrm>
           <a:prstGeom prst="roundRect">
             <a:avLst>
-              <a:gd name="adj" fmla="val 14286"/>
+              <a:gd name="adj" fmla="val 11765"/>
             </a:avLst>
           </a:prstGeom>
           <a:solidFill>
@@ -9159,8 +9159,8 @@
         </p:nvSpPr>
         <p:spPr>
           <a:xfrm>
-            <a:off x="5504688" y="1975104"/>
-            <a:ext cx="256032" cy="128016"/>
+            <a:off x="5696712" y="2286000"/>
+            <a:ext cx="298704" cy="155448"/>
           </a:xfrm>
           <a:prstGeom prst="rect">
             <a:avLst/>
@@ -9176,7 +9176,7 @@
               <a:buNone/>
             </a:pPr>
             <a:r>
-              <a:rPr lang="en-US" sz="550" b="1" dirty="0">
+              <a:rPr lang="en-US" sz="650" b="1" dirty="0">
                 <a:solidFill>
                   <a:srgbClr val="00897B"/>
                 </a:solidFill>
@@ -9186,7 +9186,7 @@
               </a:rPr>
               <a:t>DEV</a:t>
             </a:r>
-            <a:endParaRPr lang="en-US" sz="550" dirty="0"/>
+            <a:endParaRPr lang="en-US" sz="650" dirty="0"/>
           </a:p>
         </p:txBody>
       </p:sp>
@@ -9198,7 +9198,7 @@
         </p:nvSpPr>
         <p:spPr>
           <a:xfrm>
-            <a:off x="5769864" y="2039112"/>
+            <a:off x="6004560" y="2363724"/>
             <a:ext cx="91440" cy="0"/>
           </a:xfrm>
           <a:prstGeom prst="line">
@@ -9229,12 +9229,12 @@
         </p:nvSpPr>
         <p:spPr>
           <a:xfrm>
-            <a:off x="5870448" y="1975104"/>
-            <a:ext cx="256032" cy="128016"/>
+            <a:off x="6105144" y="2286000"/>
+            <a:ext cx="298704" cy="155448"/>
           </a:xfrm>
           <a:prstGeom prst="roundRect">
             <a:avLst>
-              <a:gd name="adj" fmla="val 14286"/>
+              <a:gd name="adj" fmla="val 11765"/>
             </a:avLst>
           </a:prstGeom>
           <a:solidFill>
@@ -9263,8 +9263,8 @@
         </p:nvSpPr>
         <p:spPr>
           <a:xfrm>
-            <a:off x="5870448" y="1975104"/>
-            <a:ext cx="256032" cy="128016"/>
+            <a:off x="6105144" y="2286000"/>
+            <a:ext cx="298704" cy="155448"/>
           </a:xfrm>
           <a:prstGeom prst="rect">
             <a:avLst/>
@@ -9280,7 +9280,7 @@
               <a:buNone/>
             </a:pPr>
             <a:r>
-              <a:rPr lang="en-US" sz="550" b="1" dirty="0">
+              <a:rPr lang="en-US" sz="650" b="1" dirty="0">
                 <a:solidFill>
                   <a:srgbClr val="00897B"/>
                 </a:solidFill>
@@ -9290,7 +9290,7 @@
               </a:rPr>
               <a:t>UAT</a:t>
             </a:r>
-            <a:endParaRPr lang="en-US" sz="550" dirty="0"/>
+            <a:endParaRPr lang="en-US" sz="650" dirty="0"/>
           </a:p>
         </p:txBody>
       </p:sp>
@@ -9302,7 +9302,7 @@
         </p:nvSpPr>
         <p:spPr>
           <a:xfrm>
-            <a:off x="6135624" y="2039112"/>
+            <a:off x="6412992" y="2363724"/>
             <a:ext cx="91440" cy="0"/>
           </a:xfrm>
           <a:prstGeom prst="line">
@@ -9333,12 +9333,12 @@
         </p:nvSpPr>
         <p:spPr>
           <a:xfrm>
-            <a:off x="6236208" y="1975104"/>
-            <a:ext cx="256032" cy="128016"/>
+            <a:off x="6513576" y="2286000"/>
+            <a:ext cx="298704" cy="155448"/>
           </a:xfrm>
           <a:prstGeom prst="roundRect">
             <a:avLst>
-              <a:gd name="adj" fmla="val 14286"/>
+              <a:gd name="adj" fmla="val 11765"/>
             </a:avLst>
           </a:prstGeom>
           <a:solidFill>
@@ -9367,8 +9367,8 @@
         </p:nvSpPr>
         <p:spPr>
           <a:xfrm>
-            <a:off x="6236208" y="1975104"/>
-            <a:ext cx="256032" cy="128016"/>
+            <a:off x="6513576" y="2286000"/>
+            <a:ext cx="298704" cy="155448"/>
           </a:xfrm>
           <a:prstGeom prst="rect">
             <a:avLst/>
@@ -9384,7 +9384,7 @@
               <a:buNone/>
             </a:pPr>
             <a:r>
-              <a:rPr lang="en-US" sz="550" b="1" dirty="0">
+              <a:rPr lang="en-US" sz="650" b="1" dirty="0">
                 <a:solidFill>
                   <a:srgbClr val="00897B"/>
                 </a:solidFill>
@@ -9394,7 +9394,7 @@
               </a:rPr>
               <a:t>PROD</a:t>
             </a:r>
-            <a:endParaRPr lang="en-US" sz="550" dirty="0"/>
+            <a:endParaRPr lang="en-US" sz="650" dirty="0"/>
           </a:p>
         </p:txBody>
       </p:sp>
@@ -9406,8 +9406,8 @@
         </p:nvSpPr>
         <p:spPr>
           <a:xfrm>
-            <a:off x="5248656" y="2157984"/>
-            <a:ext cx="256032" cy="128016"/>
+            <a:off x="5385816" y="2505456"/>
+            <a:ext cx="310896" cy="155448"/>
           </a:xfrm>
           <a:prstGeom prst="rect">
             <a:avLst/>
@@ -9423,7 +9423,7 @@
               <a:buNone/>
             </a:pPr>
             <a:r>
-              <a:rPr lang="en-US" sz="500" b="1" dirty="0">
+              <a:rPr lang="en-US" sz="600" b="1" dirty="0">
                 <a:solidFill>
                   <a:srgbClr val="78909C"/>
                 </a:solidFill>
@@ -9433,7 +9433,7 @@
               </a:rPr>
               <a:t>DOC</a:t>
             </a:r>
-            <a:endParaRPr lang="en-US" sz="500" dirty="0"/>
+            <a:endParaRPr lang="en-US" sz="600" dirty="0"/>
           </a:p>
         </p:txBody>
       </p:sp>
@@ -9445,12 +9445,12 @@
         </p:nvSpPr>
         <p:spPr>
           <a:xfrm>
-            <a:off x="5504688" y="2157984"/>
-            <a:ext cx="256032" cy="128016"/>
+            <a:off x="5696712" y="2505456"/>
+            <a:ext cx="298704" cy="155448"/>
           </a:xfrm>
           <a:prstGeom prst="roundRect">
             <a:avLst>
-              <a:gd name="adj" fmla="val 14286"/>
+              <a:gd name="adj" fmla="val 11765"/>
             </a:avLst>
           </a:prstGeom>
           <a:solidFill>
@@ -9479,8 +9479,8 @@
         </p:nvSpPr>
         <p:spPr>
           <a:xfrm>
-            <a:off x="5504688" y="2157984"/>
-            <a:ext cx="256032" cy="128016"/>
+            <a:off x="5696712" y="2505456"/>
+            <a:ext cx="298704" cy="155448"/>
           </a:xfrm>
           <a:prstGeom prst="rect">
             <a:avLst/>
@@ -9496,7 +9496,7 @@
               <a:buNone/>
             </a:pPr>
             <a:r>
-              <a:rPr lang="en-US" sz="550" b="1" dirty="0">
+              <a:rPr lang="en-US" sz="650" b="1" dirty="0">
                 <a:solidFill>
                   <a:srgbClr val="546E7A"/>
                 </a:solidFill>
@@ -9506,7 +9506,7 @@
               </a:rPr>
               <a:t>Ingest</a:t>
             </a:r>
-            <a:endParaRPr lang="en-US" sz="550" dirty="0"/>
+            <a:endParaRPr lang="en-US" sz="650" dirty="0"/>
           </a:p>
         </p:txBody>
       </p:sp>
@@ -9518,7 +9518,7 @@
         </p:nvSpPr>
         <p:spPr>
           <a:xfrm>
-            <a:off x="5769864" y="2221992"/>
+            <a:off x="6004560" y="2583180"/>
             <a:ext cx="91440" cy="0"/>
           </a:xfrm>
           <a:prstGeom prst="line">
@@ -9549,12 +9549,12 @@
         </p:nvSpPr>
         <p:spPr>
           <a:xfrm>
-            <a:off x="5870448" y="2157984"/>
-            <a:ext cx="256032" cy="128016"/>
+            <a:off x="6105144" y="2505456"/>
+            <a:ext cx="298704" cy="155448"/>
           </a:xfrm>
           <a:prstGeom prst="roundRect">
             <a:avLst>
-              <a:gd name="adj" fmla="val 14286"/>
+              <a:gd name="adj" fmla="val 11765"/>
             </a:avLst>
           </a:prstGeom>
           <a:solidFill>
@@ -9583,8 +9583,8 @@
         </p:nvSpPr>
         <p:spPr>
           <a:xfrm>
-            <a:off x="5870448" y="2157984"/>
-            <a:ext cx="256032" cy="128016"/>
+            <a:off x="6105144" y="2505456"/>
+            <a:ext cx="298704" cy="155448"/>
           </a:xfrm>
           <a:prstGeom prst="rect">
             <a:avLst/>
@@ -9600,7 +9600,7 @@
               <a:buNone/>
             </a:pPr>
             <a:r>
-              <a:rPr lang="en-US" sz="550" b="1" dirty="0">
+              <a:rPr lang="en-US" sz="650" b="1" dirty="0">
                 <a:solidFill>
                   <a:srgbClr val="546E7A"/>
                 </a:solidFill>
@@ -9610,7 +9610,7 @@
               </a:rPr>
               <a:t>Review</a:t>
             </a:r>
-            <a:endParaRPr lang="en-US" sz="550" dirty="0"/>
+            <a:endParaRPr lang="en-US" sz="650" dirty="0"/>
           </a:p>
         </p:txBody>
       </p:sp>
@@ -9622,7 +9622,7 @@
         </p:nvSpPr>
         <p:spPr>
           <a:xfrm>
-            <a:off x="6135624" y="2221992"/>
+            <a:off x="6412992" y="2583180"/>
             <a:ext cx="91440" cy="0"/>
           </a:xfrm>
           <a:prstGeom prst="line">
@@ -9653,12 +9653,12 @@
         </p:nvSpPr>
         <p:spPr>
           <a:xfrm>
-            <a:off x="6236208" y="2157984"/>
-            <a:ext cx="256032" cy="128016"/>
+            <a:off x="6513576" y="2505456"/>
+            <a:ext cx="298704" cy="155448"/>
           </a:xfrm>
           <a:prstGeom prst="roundRect">
             <a:avLst>
-              <a:gd name="adj" fmla="val 14286"/>
+              <a:gd name="adj" fmla="val 11765"/>
             </a:avLst>
           </a:prstGeom>
           <a:solidFill>
@@ -9687,8 +9687,8 @@
         </p:nvSpPr>
         <p:spPr>
           <a:xfrm>
-            <a:off x="6236208" y="2157984"/>
-            <a:ext cx="256032" cy="128016"/>
+            <a:off x="6513576" y="2505456"/>
+            <a:ext cx="298704" cy="155448"/>
           </a:xfrm>
           <a:prstGeom prst="rect">
             <a:avLst/>
@@ -9704,7 +9704,7 @@
               <a:buNone/>
             </a:pPr>
             <a:r>
-              <a:rPr lang="en-US" sz="550" b="1" dirty="0">
+              <a:rPr lang="en-US" sz="650" b="1" dirty="0">
                 <a:solidFill>
                   <a:srgbClr val="546E7A"/>
                 </a:solidFill>
@@ -9714,7 +9714,7 @@
               </a:rPr>
               <a:t>Improve</a:t>
             </a:r>
-            <a:endParaRPr lang="en-US" sz="550" dirty="0"/>
+            <a:endParaRPr lang="en-US" sz="650" dirty="0"/>
           </a:p>
         </p:txBody>
       </p:sp>
@@ -9726,7 +9726,7 @@
         </p:nvSpPr>
         <p:spPr>
           <a:xfrm>
-            <a:off x="2450592" y="1371600"/>
+            <a:off x="2404872" y="1536192"/>
             <a:ext cx="0" cy="0"/>
           </a:xfrm>
           <a:prstGeom prst="line">
@@ -9756,7 +9756,7 @@
         </p:nvSpPr>
         <p:spPr>
           <a:xfrm>
-            <a:off x="1261872" y="1207008"/>
+            <a:off x="1216152" y="1371600"/>
             <a:ext cx="1188720" cy="0"/>
           </a:xfrm>
           <a:prstGeom prst="line">
@@ -9786,7 +9786,7 @@
         </p:nvSpPr>
         <p:spPr>
           <a:xfrm>
-            <a:off x="1261872" y="1207008"/>
+            <a:off x="1216152" y="1371600"/>
             <a:ext cx="0" cy="164592"/>
           </a:xfrm>
           <a:prstGeom prst="line">
@@ -9817,8 +9817,8 @@
         </p:nvSpPr>
         <p:spPr>
           <a:xfrm>
-            <a:off x="1298448" y="1088136"/>
-            <a:ext cx="731520" cy="118872"/>
+            <a:off x="1252728" y="1234440"/>
+            <a:ext cx="822960" cy="137160"/>
           </a:xfrm>
           <a:prstGeom prst="rect">
             <a:avLst/>
@@ -9834,7 +9834,7 @@
               <a:buNone/>
             </a:pPr>
             <a:r>
-              <a:rPr lang="en-US" sz="550" i="1" dirty="0">
+              <a:rPr lang="en-US" sz="650" i="1" dirty="0">
                 <a:solidFill>
                   <a:srgbClr val="EF5350"/>
                 </a:solidFill>
@@ -9844,7 +9844,7 @@
               </a:rPr>
               <a:t>Rejected</a:t>
             </a:r>
-            <a:endParaRPr lang="en-US" sz="550" dirty="0"/>
+            <a:endParaRPr lang="en-US" sz="650" dirty="0"/>
           </a:p>
         </p:txBody>
       </p:sp>
@@ -9856,7 +9856,7 @@
         </p:nvSpPr>
         <p:spPr>
           <a:xfrm>
-            <a:off x="7655357" y="1371600"/>
+            <a:off x="8011973" y="1536192"/>
             <a:ext cx="0" cy="0"/>
           </a:xfrm>
           <a:prstGeom prst="line">
@@ -9886,8 +9886,8 @@
         </p:nvSpPr>
         <p:spPr>
           <a:xfrm>
-            <a:off x="3046781" y="1060704"/>
-            <a:ext cx="4608576" cy="0"/>
+            <a:off x="3129077" y="1207008"/>
+            <a:ext cx="4882896" cy="0"/>
           </a:xfrm>
           <a:prstGeom prst="line">
             <a:avLst/>
@@ -9916,8 +9916,8 @@
         </p:nvSpPr>
         <p:spPr>
           <a:xfrm>
-            <a:off x="3046781" y="1060704"/>
-            <a:ext cx="0" cy="310896"/>
+            <a:off x="3129077" y="1207008"/>
+            <a:ext cx="0" cy="329184"/>
           </a:xfrm>
           <a:prstGeom prst="line">
             <a:avLst/>
@@ -9947,8 +9947,8 @@
         </p:nvSpPr>
         <p:spPr>
           <a:xfrm>
-            <a:off x="4939589" y="932688"/>
-            <a:ext cx="822960" cy="118872"/>
+            <a:off x="5113325" y="1060704"/>
+            <a:ext cx="914400" cy="137160"/>
           </a:xfrm>
           <a:prstGeom prst="rect">
             <a:avLst/>
@@ -9964,7 +9964,7 @@
               <a:buNone/>
             </a:pPr>
             <a:r>
-              <a:rPr lang="en-US" sz="550" i="1" dirty="0">
+              <a:rPr lang="en-US" sz="650" i="1" dirty="0">
                 <a:solidFill>
                   <a:srgbClr val="F57F17"/>
                 </a:solidFill>
@@ -9974,7 +9974,7 @@
               </a:rPr>
               <a:t>Deprecated</a:t>
             </a:r>
-            <a:endParaRPr lang="en-US" sz="550" dirty="0"/>
+            <a:endParaRPr lang="en-US" sz="650" dirty="0"/>
           </a:p>
         </p:txBody>
       </p:sp>
@@ -9986,8 +9986,8 @@
         </p:nvSpPr>
         <p:spPr>
           <a:xfrm>
-            <a:off x="548640" y="2468880"/>
-            <a:ext cx="8046720" cy="0"/>
+            <a:off x="502920" y="2916936"/>
+            <a:ext cx="8138160" cy="0"/>
           </a:xfrm>
           <a:prstGeom prst="line">
             <a:avLst/>
@@ -10016,8 +10016,8 @@
         </p:nvSpPr>
         <p:spPr>
           <a:xfrm>
-            <a:off x="548640" y="2596896"/>
-            <a:ext cx="3657600" cy="164592"/>
+            <a:off x="502920" y="3081528"/>
+            <a:ext cx="4114800" cy="201168"/>
           </a:xfrm>
           <a:prstGeom prst="rect">
             <a:avLst/>
@@ -10033,7 +10033,7 @@
               <a:buNone/>
             </a:pPr>
             <a:r>
-              <a:rPr lang="en-US" sz="700" b="1" kern="0" spc="200" dirty="0">
+              <a:rPr lang="en-US" sz="800" b="1" kern="0" spc="200" dirty="0">
                 <a:solidFill>
                   <a:srgbClr val="D71E28"/>
                 </a:solidFill>
@@ -10043,7 +10043,7 @@
               </a:rPr>
               <a:t>DEVELOPER  JOURNEY</a:t>
             </a:r>
-            <a:endParaRPr lang="en-US" sz="700" dirty="0"/>
+            <a:endParaRPr lang="en-US" sz="800" dirty="0"/>
           </a:p>
         </p:txBody>
       </p:sp>
@@ -10055,8 +10055,8 @@
         </p:nvSpPr>
         <p:spPr>
           <a:xfrm>
-            <a:off x="640080" y="2852928"/>
-            <a:ext cx="1243584" cy="512064"/>
+            <a:off x="502920" y="3355848"/>
+            <a:ext cx="1426464" cy="658368"/>
           </a:xfrm>
           <a:prstGeom prst="rect">
             <a:avLst/>
@@ -10094,8 +10094,8 @@
         </p:nvSpPr>
         <p:spPr>
           <a:xfrm>
-            <a:off x="640080" y="2852928"/>
-            <a:ext cx="1243584" cy="27432"/>
+            <a:off x="502920" y="3355848"/>
+            <a:ext cx="1426464" cy="32004"/>
           </a:xfrm>
           <a:prstGeom prst="rect">
             <a:avLst/>
@@ -10121,8 +10121,8 @@
         </p:nvSpPr>
         <p:spPr>
           <a:xfrm>
-            <a:off x="694944" y="2907792"/>
-            <a:ext cx="1133856" cy="201168"/>
+            <a:off x="576072" y="3419856"/>
+            <a:ext cx="1280160" cy="237744"/>
           </a:xfrm>
           <a:prstGeom prst="rect">
             <a:avLst/>
@@ -10138,7 +10138,7 @@
               <a:buNone/>
             </a:pPr>
             <a:r>
-              <a:rPr lang="en-US" sz="900" b="1" dirty="0">
+              <a:rPr lang="en-US" sz="1100" b="1" dirty="0">
                 <a:solidFill>
                   <a:srgbClr val="263238"/>
                 </a:solidFill>
@@ -10148,7 +10148,7 @@
               </a:rPr>
               <a:t>Authenticate</a:t>
             </a:r>
-            <a:endParaRPr lang="en-US" sz="900" dirty="0"/>
+            <a:endParaRPr lang="en-US" sz="1100" dirty="0"/>
           </a:p>
         </p:txBody>
       </p:sp>
@@ -10160,8 +10160,8 @@
         </p:nvSpPr>
         <p:spPr>
           <a:xfrm>
-            <a:off x="694944" y="3108960"/>
-            <a:ext cx="1133856" cy="201168"/>
+            <a:off x="576072" y="3666744"/>
+            <a:ext cx="1280160" cy="274320"/>
           </a:xfrm>
           <a:prstGeom prst="rect">
             <a:avLst/>
@@ -10177,7 +10177,7 @@
               <a:buNone/>
             </a:pPr>
             <a:r>
-              <a:rPr lang="en-US" sz="650" dirty="0">
+              <a:rPr lang="en-US" sz="750" dirty="0">
                 <a:solidFill>
                   <a:srgbClr val="78909C"/>
                 </a:solidFill>
@@ -10187,14 +10187,14 @@
               </a:rPr>
               <a:t>SSO via IDP;</a:t>
             </a:r>
-            <a:endParaRPr lang="en-US" sz="650" dirty="0"/>
-          </a:p>
-          <a:p>
-            <a:pPr marL="0" indent="0">
-              <a:buNone/>
-            </a:pPr>
-            <a:r>
-              <a:rPr lang="en-US" sz="650" dirty="0">
+            <a:endParaRPr lang="en-US" sz="750" dirty="0"/>
+          </a:p>
+          <a:p>
+            <a:pPr marL="0" indent="0">
+              <a:buNone/>
+            </a:pPr>
+            <a:r>
+              <a:rPr lang="en-US" sz="750" dirty="0">
                 <a:solidFill>
                   <a:srgbClr val="78909C"/>
                 </a:solidFill>
@@ -10204,7 +10204,7 @@
               </a:rPr>
               <a:t>identity propagated to agent</a:t>
             </a:r>
-            <a:endParaRPr lang="en-US" sz="650" dirty="0"/>
+            <a:endParaRPr lang="en-US" sz="750" dirty="0"/>
           </a:p>
         </p:txBody>
       </p:sp>
@@ -10216,8 +10216,8 @@
         </p:nvSpPr>
         <p:spPr>
           <a:xfrm>
-            <a:off x="2176272" y="2852928"/>
-            <a:ext cx="1243584" cy="512064"/>
+            <a:off x="2130552" y="3355848"/>
+            <a:ext cx="1426464" cy="658368"/>
           </a:xfrm>
           <a:prstGeom prst="rect">
             <a:avLst/>
@@ -10255,8 +10255,8 @@
         </p:nvSpPr>
         <p:spPr>
           <a:xfrm>
-            <a:off x="2176272" y="2852928"/>
-            <a:ext cx="1243584" cy="27432"/>
+            <a:off x="2130552" y="3355848"/>
+            <a:ext cx="1426464" cy="32004"/>
           </a:xfrm>
           <a:prstGeom prst="rect">
             <a:avLst/>
@@ -10282,8 +10282,8 @@
         </p:nvSpPr>
         <p:spPr>
           <a:xfrm>
-            <a:off x="2231136" y="2907792"/>
-            <a:ext cx="1133856" cy="201168"/>
+            <a:off x="2203704" y="3419856"/>
+            <a:ext cx="1280160" cy="237744"/>
           </a:xfrm>
           <a:prstGeom prst="rect">
             <a:avLst/>
@@ -10299,7 +10299,7 @@
               <a:buNone/>
             </a:pPr>
             <a:r>
-              <a:rPr lang="en-US" sz="900" b="1" dirty="0">
+              <a:rPr lang="en-US" sz="1100" b="1" dirty="0">
                 <a:solidFill>
                   <a:srgbClr val="263238"/>
                 </a:solidFill>
@@ -10309,7 +10309,7 @@
               </a:rPr>
               <a:t>Query</a:t>
             </a:r>
-            <a:endParaRPr lang="en-US" sz="900" dirty="0"/>
+            <a:endParaRPr lang="en-US" sz="1100" dirty="0"/>
           </a:p>
         </p:txBody>
       </p:sp>
@@ -10321,8 +10321,8 @@
         </p:nvSpPr>
         <p:spPr>
           <a:xfrm>
-            <a:off x="2231136" y="3108960"/>
-            <a:ext cx="1133856" cy="201168"/>
+            <a:off x="2203704" y="3666744"/>
+            <a:ext cx="1280160" cy="274320"/>
           </a:xfrm>
           <a:prstGeom prst="rect">
             <a:avLst/>
@@ -10338,7 +10338,7 @@
               <a:buNone/>
             </a:pPr>
             <a:r>
-              <a:rPr lang="en-US" sz="650" dirty="0">
+              <a:rPr lang="en-US" sz="750" dirty="0">
                 <a:solidFill>
                   <a:srgbClr val="78909C"/>
                 </a:solidFill>
@@ -10348,14 +10348,14 @@
               </a:rPr>
               <a:t>Developer poses question</a:t>
             </a:r>
-            <a:endParaRPr lang="en-US" sz="650" dirty="0"/>
-          </a:p>
-          <a:p>
-            <a:pPr marL="0" indent="0">
-              <a:buNone/>
-            </a:pPr>
-            <a:r>
-              <a:rPr lang="en-US" sz="650" dirty="0">
+            <a:endParaRPr lang="en-US" sz="750" dirty="0"/>
+          </a:p>
+          <a:p>
+            <a:pPr marL="0" indent="0">
+              <a:buNone/>
+            </a:pPr>
+            <a:r>
+              <a:rPr lang="en-US" sz="750" dirty="0">
                 <a:solidFill>
                   <a:srgbClr val="78909C"/>
                 </a:solidFill>
@@ -10365,7 +10365,7 @@
               </a:rPr>
               <a:t>in natural language</a:t>
             </a:r>
-            <a:endParaRPr lang="en-US" sz="650" dirty="0"/>
+            <a:endParaRPr lang="en-US" sz="750" dirty="0"/>
           </a:p>
         </p:txBody>
       </p:sp>
@@ -10377,8 +10377,8 @@
         </p:nvSpPr>
         <p:spPr>
           <a:xfrm>
-            <a:off x="3712464" y="2852928"/>
-            <a:ext cx="1243584" cy="512064"/>
+            <a:off x="3758184" y="3355848"/>
+            <a:ext cx="1426464" cy="658368"/>
           </a:xfrm>
           <a:prstGeom prst="rect">
             <a:avLst/>
@@ -10416,8 +10416,8 @@
         </p:nvSpPr>
         <p:spPr>
           <a:xfrm>
-            <a:off x="3712464" y="2852928"/>
-            <a:ext cx="1243584" cy="27432"/>
+            <a:off x="3758184" y="3355848"/>
+            <a:ext cx="1426464" cy="32004"/>
           </a:xfrm>
           <a:prstGeom prst="rect">
             <a:avLst/>
@@ -10443,8 +10443,8 @@
         </p:nvSpPr>
         <p:spPr>
           <a:xfrm>
-            <a:off x="3767328" y="2907792"/>
-            <a:ext cx="1133856" cy="201168"/>
+            <a:off x="3831336" y="3419856"/>
+            <a:ext cx="1280160" cy="237744"/>
           </a:xfrm>
           <a:prstGeom prst="rect">
             <a:avLst/>
@@ -10460,7 +10460,7 @@
               <a:buNone/>
             </a:pPr>
             <a:r>
-              <a:rPr lang="en-US" sz="900" b="1" dirty="0">
+              <a:rPr lang="en-US" sz="1100" b="1" dirty="0">
                 <a:solidFill>
                   <a:srgbClr val="263238"/>
                 </a:solidFill>
@@ -10470,7 +10470,7 @@
               </a:rPr>
               <a:t>Orchestrate</a:t>
             </a:r>
-            <a:endParaRPr lang="en-US" sz="900" dirty="0"/>
+            <a:endParaRPr lang="en-US" sz="1100" dirty="0"/>
           </a:p>
         </p:txBody>
       </p:sp>
@@ -10482,8 +10482,8 @@
         </p:nvSpPr>
         <p:spPr>
           <a:xfrm>
-            <a:off x="3767328" y="3108960"/>
-            <a:ext cx="1133856" cy="201168"/>
+            <a:off x="3831336" y="3666744"/>
+            <a:ext cx="1280160" cy="274320"/>
           </a:xfrm>
           <a:prstGeom prst="rect">
             <a:avLst/>
@@ -10499,7 +10499,7 @@
               <a:buNone/>
             </a:pPr>
             <a:r>
-              <a:rPr lang="en-US" sz="650" dirty="0">
+              <a:rPr lang="en-US" sz="750" dirty="0">
                 <a:solidFill>
                   <a:srgbClr val="78909C"/>
                 </a:solidFill>
@@ -10509,14 +10509,14 @@
               </a:rPr>
               <a:t>Supervisor routes to</a:t>
             </a:r>
-            <a:endParaRPr lang="en-US" sz="650" dirty="0"/>
-          </a:p>
-          <a:p>
-            <a:pPr marL="0" indent="0">
-              <a:buNone/>
-            </a:pPr>
-            <a:r>
-              <a:rPr lang="en-US" sz="650" dirty="0">
+            <a:endParaRPr lang="en-US" sz="750" dirty="0"/>
+          </a:p>
+          <a:p>
+            <a:pPr marL="0" indent="0">
+              <a:buNone/>
+            </a:pPr>
+            <a:r>
+              <a:rPr lang="en-US" sz="750" dirty="0">
                 <a:solidFill>
                   <a:srgbClr val="78909C"/>
                 </a:solidFill>
@@ -10526,7 +10526,7 @@
               </a:rPr>
               <a:t>specialized sub-agent</a:t>
             </a:r>
-            <a:endParaRPr lang="en-US" sz="650" dirty="0"/>
+            <a:endParaRPr lang="en-US" sz="750" dirty="0"/>
           </a:p>
         </p:txBody>
       </p:sp>
@@ -10538,8 +10538,8 @@
         </p:nvSpPr>
         <p:spPr>
           <a:xfrm>
-            <a:off x="5248656" y="2852928"/>
-            <a:ext cx="1243584" cy="512064"/>
+            <a:off x="5385816" y="3355848"/>
+            <a:ext cx="1426464" cy="658368"/>
           </a:xfrm>
           <a:prstGeom prst="rect">
             <a:avLst/>
@@ -10577,8 +10577,8 @@
         </p:nvSpPr>
         <p:spPr>
           <a:xfrm>
-            <a:off x="5248656" y="2852928"/>
-            <a:ext cx="1243584" cy="27432"/>
+            <a:off x="5385816" y="3355848"/>
+            <a:ext cx="1426464" cy="32004"/>
           </a:xfrm>
           <a:prstGeom prst="rect">
             <a:avLst/>
@@ -10604,8 +10604,8 @@
         </p:nvSpPr>
         <p:spPr>
           <a:xfrm>
-            <a:off x="5303520" y="2907792"/>
-            <a:ext cx="1133856" cy="201168"/>
+            <a:off x="5458968" y="3419856"/>
+            <a:ext cx="1280160" cy="237744"/>
           </a:xfrm>
           <a:prstGeom prst="rect">
             <a:avLst/>
@@ -10621,7 +10621,7 @@
               <a:buNone/>
             </a:pPr>
             <a:r>
-              <a:rPr lang="en-US" sz="900" b="1" dirty="0">
+              <a:rPr lang="en-US" sz="1100" b="1" dirty="0">
                 <a:solidFill>
                   <a:srgbClr val="263238"/>
                 </a:solidFill>
@@ -10631,7 +10631,7 @@
               </a:rPr>
               <a:t>Retrieve</a:t>
             </a:r>
-            <a:endParaRPr lang="en-US" sz="900" dirty="0"/>
+            <a:endParaRPr lang="en-US" sz="1100" dirty="0"/>
           </a:p>
         </p:txBody>
       </p:sp>
@@ -10643,8 +10643,8 @@
         </p:nvSpPr>
         <p:spPr>
           <a:xfrm>
-            <a:off x="5303520" y="3108960"/>
-            <a:ext cx="1133856" cy="201168"/>
+            <a:off x="5458968" y="3666744"/>
+            <a:ext cx="1280160" cy="274320"/>
           </a:xfrm>
           <a:prstGeom prst="rect">
             <a:avLst/>
@@ -10660,7 +10660,7 @@
               <a:buNone/>
             </a:pPr>
             <a:r>
-              <a:rPr lang="en-US" sz="650" dirty="0">
+              <a:rPr lang="en-US" sz="750" dirty="0">
                 <a:solidFill>
                   <a:srgbClr val="78909C"/>
                 </a:solidFill>
@@ -10670,14 +10670,14 @@
               </a:rPr>
               <a:t>Agent queries MCPs,</a:t>
             </a:r>
-            <a:endParaRPr lang="en-US" sz="650" dirty="0"/>
-          </a:p>
-          <a:p>
-            <a:pPr marL="0" indent="0">
-              <a:buNone/>
-            </a:pPr>
-            <a:r>
-              <a:rPr lang="en-US" sz="650" dirty="0">
+            <a:endParaRPr lang="en-US" sz="750" dirty="0"/>
+          </a:p>
+          <a:p>
+            <a:pPr marL="0" indent="0">
+              <a:buNone/>
+            </a:pPr>
+            <a:r>
+              <a:rPr lang="en-US" sz="750" dirty="0">
                 <a:solidFill>
                   <a:srgbClr val="78909C"/>
                 </a:solidFill>
@@ -10687,7 +10687,7 @@
               </a:rPr>
               <a:t>APIs &amp; knowledge base</a:t>
             </a:r>
-            <a:endParaRPr lang="en-US" sz="650" dirty="0"/>
+            <a:endParaRPr lang="en-US" sz="750" dirty="0"/>
           </a:p>
         </p:txBody>
       </p:sp>
@@ -10699,8 +10699,8 @@
         </p:nvSpPr>
         <p:spPr>
           <a:xfrm>
-            <a:off x="6784848" y="2852928"/>
-            <a:ext cx="1243584" cy="512064"/>
+            <a:off x="7013448" y="3355848"/>
+            <a:ext cx="1426464" cy="658368"/>
           </a:xfrm>
           <a:prstGeom prst="rect">
             <a:avLst/>
@@ -10738,8 +10738,8 @@
         </p:nvSpPr>
         <p:spPr>
           <a:xfrm>
-            <a:off x="6784848" y="2852928"/>
-            <a:ext cx="1243584" cy="27432"/>
+            <a:off x="7013448" y="3355848"/>
+            <a:ext cx="1426464" cy="32004"/>
           </a:xfrm>
           <a:prstGeom prst="rect">
             <a:avLst/>
@@ -10765,8 +10765,8 @@
         </p:nvSpPr>
         <p:spPr>
           <a:xfrm>
-            <a:off x="6839712" y="2907792"/>
-            <a:ext cx="1133856" cy="201168"/>
+            <a:off x="7086600" y="3419856"/>
+            <a:ext cx="1280160" cy="237744"/>
           </a:xfrm>
           <a:prstGeom prst="rect">
             <a:avLst/>
@@ -10782,7 +10782,7 @@
               <a:buNone/>
             </a:pPr>
             <a:r>
-              <a:rPr lang="en-US" sz="900" b="1" dirty="0">
+              <a:rPr lang="en-US" sz="1100" b="1" dirty="0">
                 <a:solidFill>
                   <a:srgbClr val="263238"/>
                 </a:solidFill>
@@ -10792,7 +10792,7 @@
               </a:rPr>
               <a:t>Respond</a:t>
             </a:r>
-            <a:endParaRPr lang="en-US" sz="900" dirty="0"/>
+            <a:endParaRPr lang="en-US" sz="1100" dirty="0"/>
           </a:p>
         </p:txBody>
       </p:sp>
@@ -10804,8 +10804,8 @@
         </p:nvSpPr>
         <p:spPr>
           <a:xfrm>
-            <a:off x="6839712" y="3108960"/>
-            <a:ext cx="1133856" cy="201168"/>
+            <a:off x="7086600" y="3666744"/>
+            <a:ext cx="1280160" cy="274320"/>
           </a:xfrm>
           <a:prstGeom prst="rect">
             <a:avLst/>
@@ -10821,7 +10821,7 @@
               <a:buNone/>
             </a:pPr>
             <a:r>
-              <a:rPr lang="en-US" sz="650" dirty="0">
+              <a:rPr lang="en-US" sz="750" dirty="0">
                 <a:solidFill>
                   <a:srgbClr val="78909C"/>
                 </a:solidFill>
@@ -10831,14 +10831,14 @@
               </a:rPr>
               <a:t>Consolidated answer</a:t>
             </a:r>
-            <a:endParaRPr lang="en-US" sz="650" dirty="0"/>
-          </a:p>
-          <a:p>
-            <a:pPr marL="0" indent="0">
-              <a:buNone/>
-            </a:pPr>
-            <a:r>
-              <a:rPr lang="en-US" sz="650" dirty="0">
+            <a:endParaRPr lang="en-US" sz="750" dirty="0"/>
+          </a:p>
+          <a:p>
+            <a:pPr marL="0" indent="0">
+              <a:buNone/>
+            </a:pPr>
+            <a:r>
+              <a:rPr lang="en-US" sz="750" dirty="0">
                 <a:solidFill>
                   <a:srgbClr val="78909C"/>
                 </a:solidFill>
@@ -10848,7 +10848,7 @@
               </a:rPr>
               <a:t>with source citations</a:t>
             </a:r>
-            <a:endParaRPr lang="en-US" sz="650" dirty="0"/>
+            <a:endParaRPr lang="en-US" sz="750" dirty="0"/>
           </a:p>
         </p:txBody>
       </p:sp>
@@ -10860,8 +10860,8 @@
         </p:nvSpPr>
         <p:spPr>
           <a:xfrm>
-            <a:off x="1920240" y="3108960"/>
-            <a:ext cx="219456" cy="0"/>
+            <a:off x="1965960" y="3685032"/>
+            <a:ext cx="128016" cy="0"/>
           </a:xfrm>
           <a:prstGeom prst="line">
             <a:avLst/>
@@ -10891,8 +10891,8 @@
         </p:nvSpPr>
         <p:spPr>
           <a:xfrm>
-            <a:off x="3456432" y="3108960"/>
-            <a:ext cx="219456" cy="0"/>
+            <a:off x="3593592" y="3685032"/>
+            <a:ext cx="128016" cy="0"/>
           </a:xfrm>
           <a:prstGeom prst="line">
             <a:avLst/>
@@ -10922,8 +10922,8 @@
         </p:nvSpPr>
         <p:spPr>
           <a:xfrm>
-            <a:off x="4992624" y="3108960"/>
-            <a:ext cx="219456" cy="0"/>
+            <a:off x="5221224" y="3685032"/>
+            <a:ext cx="128016" cy="0"/>
           </a:xfrm>
           <a:prstGeom prst="line">
             <a:avLst/>
@@ -10953,8 +10953,8 @@
         </p:nvSpPr>
         <p:spPr>
           <a:xfrm>
-            <a:off x="6528816" y="3108960"/>
-            <a:ext cx="219456" cy="0"/>
+            <a:off x="6848856" y="3685032"/>
+            <a:ext cx="128016" cy="0"/>
           </a:xfrm>
           <a:prstGeom prst="line">
             <a:avLst/>
@@ -10984,8 +10984,8 @@
         </p:nvSpPr>
         <p:spPr>
           <a:xfrm>
-            <a:off x="7406640" y="3364992"/>
-            <a:ext cx="0" cy="128016"/>
+            <a:off x="7726680" y="4014216"/>
+            <a:ext cx="0" cy="146304"/>
           </a:xfrm>
           <a:prstGeom prst="line">
             <a:avLst/>
@@ -11014,8 +11014,8 @@
         </p:nvSpPr>
         <p:spPr>
           <a:xfrm>
-            <a:off x="2798064" y="3493008"/>
-            <a:ext cx="4608576" cy="0"/>
+            <a:off x="2843784" y="4160520"/>
+            <a:ext cx="4882896" cy="0"/>
           </a:xfrm>
           <a:prstGeom prst="line">
             <a:avLst/>
@@ -11044,7 +11044,7 @@
         </p:nvSpPr>
         <p:spPr>
           <a:xfrm>
-            <a:off x="2798064" y="3493008"/>
+            <a:off x="2843784" y="4160520"/>
             <a:ext cx="0" cy="0"/>
           </a:xfrm>
           <a:prstGeom prst="line">
@@ -11075,8 +11075,8 @@
         </p:nvSpPr>
         <p:spPr>
           <a:xfrm>
-            <a:off x="4736592" y="3502152"/>
-            <a:ext cx="731520" cy="128016"/>
+            <a:off x="4873752" y="4178808"/>
+            <a:ext cx="822960" cy="146304"/>
           </a:xfrm>
           <a:prstGeom prst="rect">
             <a:avLst/>
@@ -11092,7 +11092,7 @@
               <a:buNone/>
             </a:pPr>
             <a:r>
-              <a:rPr lang="en-US" sz="600" i="1" dirty="0">
+              <a:rPr lang="en-US" sz="650" i="1" dirty="0">
                 <a:solidFill>
                   <a:srgbClr val="78909C"/>
                 </a:solidFill>
@@ -11102,7 +11102,7 @@
               </a:rPr>
               <a:t>Follow-up</a:t>
             </a:r>
-            <a:endParaRPr lang="en-US" sz="600" dirty="0"/>
+            <a:endParaRPr lang="en-US" sz="650" dirty="0"/>
           </a:p>
         </p:txBody>
       </p:sp>
